--- a/assets/figures-editable/c3-c4/c4-e18.pptx
+++ b/assets/figures-editable/c3-c4/c4-e18.pptx
@@ -3104,8 +3104,8 @@
         </p:nvSpPr>
         <p:spPr>
           <a:xfrm>
-            <a:off x="274320" y="137160"/>
-            <a:ext cx="11612880" cy="365760"/>
+            <a:off x="274320" y="118872"/>
+            <a:ext cx="11612880" cy="340105"/>
           </a:xfrm>
           <a:prstGeom prst="rect">
             <a:avLst/>
@@ -3114,7 +3114,7 @@
           <a:effectLst/>
         </p:spPr>
         <p:txBody>
-          <a:bodyPr wrap="square" lIns="27432" rIns="27432" tIns="18288" bIns="18288" anchor="ctr">
+          <a:bodyPr wrap="none" lIns="18288" rIns="18288" tIns="18288" bIns="18288" anchor="t">
             <a:spAutoFit/>
           </a:bodyPr>
           <a:lstStyle/>
@@ -3125,7 +3125,7 @@
               </a:spcAft>
             </a:pPr>
             <a:r>
-              <a:rPr sz="2100" b="0" i="0">
+              <a:rPr sz="1900" b="1" i="0">
                 <a:solidFill>
                   <a:srgbClr val="8EDBD4"/>
                 </a:solidFill>
@@ -3144,13 +3144,13 @@
         </p:nvCxnSpPr>
         <p:spPr>
           <a:xfrm>
-            <a:off x="731520" y="2880360"/>
-            <a:ext cx="6675120" cy="0"/>
+            <a:off x="914400" y="4937760"/>
+            <a:ext cx="5669280" cy="0"/>
           </a:xfrm>
           <a:prstGeom prst="line">
             <a:avLst/>
           </a:prstGeom>
-          <a:ln w="25400">
+          <a:ln w="19050">
             <a:solidFill>
               <a:srgbClr val="B4C7D2"/>
             </a:solidFill>
@@ -3165,16 +3165,16 @@
           <p:nvPr/>
         </p:nvCxnSpPr>
         <p:spPr>
-          <a:xfrm flipV="1">
-            <a:off x="1005840" y="2876570"/>
-            <a:ext cx="76581" cy="3790"/>
+          <a:xfrm>
+            <a:off x="914400" y="1371600"/>
+            <a:ext cx="0" cy="3566160"/>
           </a:xfrm>
           <a:prstGeom prst="line">
             <a:avLst/>
           </a:prstGeom>
-          <a:ln w="25400">
+          <a:ln w="19050">
             <a:solidFill>
-              <a:srgbClr val="8EDBD4"/>
+              <a:srgbClr val="B4C7D2"/>
             </a:solidFill>
           </a:ln>
           <a:effectLst/>
@@ -3187,16 +3187,16 @@
           <p:nvPr/>
         </p:nvCxnSpPr>
         <p:spPr>
-          <a:xfrm flipV="1">
-            <a:off x="1082421" y="2865582"/>
-            <a:ext cx="76581" cy="10988"/>
+          <a:xfrm>
+            <a:off x="914400" y="4937760"/>
+            <a:ext cx="0" cy="64008"/>
           </a:xfrm>
           <a:prstGeom prst="line">
             <a:avLst/>
           </a:prstGeom>
-          <a:ln w="25400">
+          <a:ln w="12700">
             <a:solidFill>
-              <a:srgbClr val="8EDBD4"/>
+              <a:srgbClr val="B4C7D2"/>
             </a:solidFill>
           </a:ln>
           <a:effectLst/>
@@ -3209,43 +3209,61 @@
           <p:nvPr/>
         </p:nvCxnSpPr>
         <p:spPr>
-          <a:xfrm flipV="1">
-            <a:off x="1159002" y="2847958"/>
-            <a:ext cx="76581" cy="17624"/>
+          <a:xfrm>
+            <a:off x="914400" y="1371600"/>
+            <a:ext cx="0" cy="3566160"/>
           </a:xfrm>
           <a:prstGeom prst="line">
             <a:avLst/>
           </a:prstGeom>
-          <a:ln w="25400">
+          <a:ln w="7620">
             <a:solidFill>
-              <a:srgbClr val="8EDBD4"/>
+              <a:srgbClr val="2E4756"/>
             </a:solidFill>
           </a:ln>
           <a:effectLst/>
         </p:spPr>
       </p:cxnSp>
-      <p:cxnSp>
-        <p:nvCxnSpPr>
-          <p:cNvPr id="7" name="C4-E18 line 5" descr="sci-ppt:o005"/>
-          <p:cNvCxnSpPr/>
+      <p:sp>
+        <p:nvSpPr>
+          <p:cNvPr id="7" name="C4-E18 text 5" descr="sci-ppt:o005"/>
+          <p:cNvSpPr txBox="1"/>
           <p:nvPr/>
-        </p:nvCxnSpPr>
+        </p:nvSpPr>
         <p:spPr>
-          <a:xfrm flipV="1">
-            <a:off x="1235583" y="2824243"/>
-            <a:ext cx="76581" cy="23715"/>
+          <a:xfrm>
+            <a:off x="457200" y="5020056"/>
+            <a:ext cx="914400" cy="208407"/>
           </a:xfrm>
-          <a:prstGeom prst="line">
+          <a:prstGeom prst="rect">
             <a:avLst/>
           </a:prstGeom>
-          <a:ln w="25400">
-            <a:solidFill>
-              <a:srgbClr val="8EDBD4"/>
-            </a:solidFill>
-          </a:ln>
+          <a:noFill/>
           <a:effectLst/>
         </p:spPr>
-      </p:cxnSp>
+        <p:txBody>
+          <a:bodyPr wrap="none" lIns="18288" rIns="18288" tIns="18288" bIns="18288" anchor="t">
+            <a:spAutoFit/>
+          </a:bodyPr>
+          <a:lstStyle/>
+          <a:p>
+            <a:pPr algn="ctr">
+              <a:spcAft>
+                <a:spcPts val="0"/>
+              </a:spcAft>
+            </a:pPr>
+            <a:r>
+              <a:rPr sz="1050" b="0" i="0">
+                <a:solidFill>
+                  <a:srgbClr val="B4C7D2"/>
+                </a:solidFill>
+                <a:latin typeface="Arial"/>
+              </a:rPr>
+              <a:t>0.00</a:t>
+            </a:r>
+          </a:p>
+        </p:txBody>
+      </p:sp>
       <p:cxnSp>
         <p:nvCxnSpPr>
           <p:cNvPr id="8" name="C4-E18 line 6" descr="sci-ppt:o006"/>
@@ -3253,16 +3271,16 @@
           <p:nvPr/>
         </p:nvCxnSpPr>
         <p:spPr>
-          <a:xfrm flipV="1">
-            <a:off x="1312164" y="2794969"/>
-            <a:ext cx="76581" cy="29274"/>
+          <a:xfrm>
+            <a:off x="2331720" y="4937760"/>
+            <a:ext cx="0" cy="64008"/>
           </a:xfrm>
           <a:prstGeom prst="line">
             <a:avLst/>
           </a:prstGeom>
-          <a:ln w="25400">
+          <a:ln w="12700">
             <a:solidFill>
-              <a:srgbClr val="8EDBD4"/>
+              <a:srgbClr val="B4C7D2"/>
             </a:solidFill>
           </a:ln>
           <a:effectLst/>
@@ -3275,43 +3293,61 @@
           <p:nvPr/>
         </p:nvCxnSpPr>
         <p:spPr>
-          <a:xfrm flipV="1">
-            <a:off x="1388745" y="2760655"/>
-            <a:ext cx="76581" cy="34314"/>
+          <a:xfrm>
+            <a:off x="2331720" y="1371600"/>
+            <a:ext cx="0" cy="3566160"/>
           </a:xfrm>
           <a:prstGeom prst="line">
             <a:avLst/>
           </a:prstGeom>
-          <a:ln w="25400">
+          <a:ln w="7620">
             <a:solidFill>
-              <a:srgbClr val="8EDBD4"/>
+              <a:srgbClr val="2E4756"/>
             </a:solidFill>
           </a:ln>
           <a:effectLst/>
         </p:spPr>
       </p:cxnSp>
-      <p:cxnSp>
-        <p:nvCxnSpPr>
-          <p:cNvPr id="10" name="C4-E18 line 8" descr="sci-ppt:o008"/>
-          <p:cNvCxnSpPr/>
+      <p:sp>
+        <p:nvSpPr>
+          <p:cNvPr id="10" name="C4-E18 text 8" descr="sci-ppt:o008"/>
+          <p:cNvSpPr txBox="1"/>
           <p:nvPr/>
-        </p:nvCxnSpPr>
+        </p:nvSpPr>
         <p:spPr>
-          <a:xfrm flipV="1">
-            <a:off x="1465326" y="2721802"/>
-            <a:ext cx="76581" cy="38853"/>
+          <a:xfrm>
+            <a:off x="1874519" y="5020056"/>
+            <a:ext cx="914400" cy="208407"/>
           </a:xfrm>
-          <a:prstGeom prst="line">
+          <a:prstGeom prst="rect">
             <a:avLst/>
           </a:prstGeom>
-          <a:ln w="25400">
-            <a:solidFill>
-              <a:srgbClr val="8EDBD4"/>
-            </a:solidFill>
-          </a:ln>
+          <a:noFill/>
           <a:effectLst/>
         </p:spPr>
-      </p:cxnSp>
+        <p:txBody>
+          <a:bodyPr wrap="none" lIns="18288" rIns="18288" tIns="18288" bIns="18288" anchor="t">
+            <a:spAutoFit/>
+          </a:bodyPr>
+          <a:lstStyle/>
+          <a:p>
+            <a:pPr algn="ctr">
+              <a:spcAft>
+                <a:spcPts val="0"/>
+              </a:spcAft>
+            </a:pPr>
+            <a:r>
+              <a:rPr sz="1050" b="0" i="0">
+                <a:solidFill>
+                  <a:srgbClr val="B4C7D2"/>
+                </a:solidFill>
+                <a:latin typeface="Arial"/>
+              </a:rPr>
+              <a:t>0.25</a:t>
+            </a:r>
+          </a:p>
+        </p:txBody>
+      </p:sp>
       <p:cxnSp>
         <p:nvCxnSpPr>
           <p:cNvPr id="11" name="C4-E18 line 9" descr="sci-ppt:o009"/>
@@ -3319,16 +3355,16 @@
           <p:nvPr/>
         </p:nvCxnSpPr>
         <p:spPr>
-          <a:xfrm flipV="1">
-            <a:off x="1541907" y="2678899"/>
-            <a:ext cx="76581" cy="42903"/>
+          <a:xfrm>
+            <a:off x="3749039" y="4937760"/>
+            <a:ext cx="0" cy="64008"/>
           </a:xfrm>
           <a:prstGeom prst="line">
             <a:avLst/>
           </a:prstGeom>
-          <a:ln w="25400">
+          <a:ln w="12700">
             <a:solidFill>
-              <a:srgbClr val="8EDBD4"/>
+              <a:srgbClr val="B4C7D2"/>
             </a:solidFill>
           </a:ln>
           <a:effectLst/>
@@ -3341,43 +3377,61 @@
           <p:nvPr/>
         </p:nvCxnSpPr>
         <p:spPr>
-          <a:xfrm flipV="1">
-            <a:off x="1618488" y="2632419"/>
-            <a:ext cx="76581" cy="46480"/>
+          <a:xfrm>
+            <a:off x="3749039" y="1371600"/>
+            <a:ext cx="0" cy="3566160"/>
           </a:xfrm>
           <a:prstGeom prst="line">
             <a:avLst/>
           </a:prstGeom>
-          <a:ln w="25400">
+          <a:ln w="7620">
             <a:solidFill>
-              <a:srgbClr val="8EDBD4"/>
+              <a:srgbClr val="2E4756"/>
             </a:solidFill>
           </a:ln>
           <a:effectLst/>
         </p:spPr>
       </p:cxnSp>
-      <p:cxnSp>
-        <p:nvCxnSpPr>
-          <p:cNvPr id="13" name="C4-E18 line 11" descr="sci-ppt:o011"/>
-          <p:cNvCxnSpPr/>
+      <p:sp>
+        <p:nvSpPr>
+          <p:cNvPr id="13" name="C4-E18 text 11" descr="sci-ppt:o011"/>
+          <p:cNvSpPr txBox="1"/>
           <p:nvPr/>
-        </p:nvCxnSpPr>
+        </p:nvSpPr>
         <p:spPr>
-          <a:xfrm flipV="1">
-            <a:off x="1695069" y="2582822"/>
-            <a:ext cx="76581" cy="49597"/>
+          <a:xfrm>
+            <a:off x="3291839" y="5020056"/>
+            <a:ext cx="914400" cy="208407"/>
           </a:xfrm>
-          <a:prstGeom prst="line">
+          <a:prstGeom prst="rect">
             <a:avLst/>
           </a:prstGeom>
-          <a:ln w="25400">
-            <a:solidFill>
-              <a:srgbClr val="8EDBD4"/>
-            </a:solidFill>
-          </a:ln>
+          <a:noFill/>
           <a:effectLst/>
         </p:spPr>
-      </p:cxnSp>
+        <p:txBody>
+          <a:bodyPr wrap="none" lIns="18288" rIns="18288" tIns="18288" bIns="18288" anchor="t">
+            <a:spAutoFit/>
+          </a:bodyPr>
+          <a:lstStyle/>
+          <a:p>
+            <a:pPr algn="ctr">
+              <a:spcAft>
+                <a:spcPts val="0"/>
+              </a:spcAft>
+            </a:pPr>
+            <a:r>
+              <a:rPr sz="1050" b="0" i="0">
+                <a:solidFill>
+                  <a:srgbClr val="B4C7D2"/>
+                </a:solidFill>
+                <a:latin typeface="Arial"/>
+              </a:rPr>
+              <a:t>0.50</a:t>
+            </a:r>
+          </a:p>
+        </p:txBody>
+      </p:sp>
       <p:cxnSp>
         <p:nvCxnSpPr>
           <p:cNvPr id="14" name="C4-E18 line 12" descr="sci-ppt:o012"/>
@@ -3385,16 +3439,16 @@
           <p:nvPr/>
         </p:nvCxnSpPr>
         <p:spPr>
-          <a:xfrm flipV="1">
-            <a:off x="1771650" y="2530552"/>
-            <a:ext cx="76581" cy="52270"/>
+          <a:xfrm>
+            <a:off x="5166360" y="4937760"/>
+            <a:ext cx="0" cy="64008"/>
           </a:xfrm>
           <a:prstGeom prst="line">
             <a:avLst/>
           </a:prstGeom>
-          <a:ln w="25400">
+          <a:ln w="12700">
             <a:solidFill>
-              <a:srgbClr val="8EDBD4"/>
+              <a:srgbClr val="B4C7D2"/>
             </a:solidFill>
           </a:ln>
           <a:effectLst/>
@@ -3407,43 +3461,61 @@
           <p:nvPr/>
         </p:nvCxnSpPr>
         <p:spPr>
-          <a:xfrm flipV="1">
-            <a:off x="1848231" y="2476039"/>
-            <a:ext cx="76581" cy="54513"/>
+          <a:xfrm>
+            <a:off x="5166360" y="1371600"/>
+            <a:ext cx="0" cy="3566160"/>
           </a:xfrm>
           <a:prstGeom prst="line">
             <a:avLst/>
           </a:prstGeom>
-          <a:ln w="25400">
+          <a:ln w="7620">
             <a:solidFill>
-              <a:srgbClr val="8EDBD4"/>
+              <a:srgbClr val="2E4756"/>
             </a:solidFill>
           </a:ln>
           <a:effectLst/>
         </p:spPr>
       </p:cxnSp>
-      <p:cxnSp>
-        <p:nvCxnSpPr>
-          <p:cNvPr id="16" name="C4-E18 line 14" descr="sci-ppt:o014"/>
-          <p:cNvCxnSpPr/>
+      <p:sp>
+        <p:nvSpPr>
+          <p:cNvPr id="16" name="C4-E18 text 14" descr="sci-ppt:o014"/>
+          <p:cNvSpPr txBox="1"/>
           <p:nvPr/>
-        </p:nvCxnSpPr>
+        </p:nvSpPr>
         <p:spPr>
-          <a:xfrm flipV="1">
-            <a:off x="1924812" y="2419698"/>
-            <a:ext cx="76581" cy="56341"/>
+          <a:xfrm>
+            <a:off x="4709160" y="5020056"/>
+            <a:ext cx="914400" cy="208407"/>
           </a:xfrm>
-          <a:prstGeom prst="line">
+          <a:prstGeom prst="rect">
             <a:avLst/>
           </a:prstGeom>
-          <a:ln w="25400">
-            <a:solidFill>
-              <a:srgbClr val="8EDBD4"/>
-            </a:solidFill>
-          </a:ln>
+          <a:noFill/>
           <a:effectLst/>
         </p:spPr>
-      </p:cxnSp>
+        <p:txBody>
+          <a:bodyPr wrap="none" lIns="18288" rIns="18288" tIns="18288" bIns="18288" anchor="t">
+            <a:spAutoFit/>
+          </a:bodyPr>
+          <a:lstStyle/>
+          <a:p>
+            <a:pPr algn="ctr">
+              <a:spcAft>
+                <a:spcPts val="0"/>
+              </a:spcAft>
+            </a:pPr>
+            <a:r>
+              <a:rPr sz="1050" b="0" i="0">
+                <a:solidFill>
+                  <a:srgbClr val="B4C7D2"/>
+                </a:solidFill>
+                <a:latin typeface="Arial"/>
+              </a:rPr>
+              <a:t>0.75</a:t>
+            </a:r>
+          </a:p>
+        </p:txBody>
+      </p:sp>
       <p:cxnSp>
         <p:nvCxnSpPr>
           <p:cNvPr id="17" name="C4-E18 line 15" descr="sci-ppt:o015"/>
@@ -3451,16 +3523,16 @@
           <p:nvPr/>
         </p:nvCxnSpPr>
         <p:spPr>
-          <a:xfrm flipV="1">
-            <a:off x="2001393" y="2361931"/>
-            <a:ext cx="76581" cy="57767"/>
+          <a:xfrm>
+            <a:off x="6583680" y="4937760"/>
+            <a:ext cx="0" cy="64008"/>
           </a:xfrm>
           <a:prstGeom prst="line">
             <a:avLst/>
           </a:prstGeom>
-          <a:ln w="25400">
+          <a:ln w="12700">
             <a:solidFill>
-              <a:srgbClr val="8EDBD4"/>
+              <a:srgbClr val="B4C7D2"/>
             </a:solidFill>
           </a:ln>
           <a:effectLst/>
@@ -3473,43 +3545,61 @@
           <p:nvPr/>
         </p:nvCxnSpPr>
         <p:spPr>
-          <a:xfrm flipV="1">
-            <a:off x="2077974" y="2303122"/>
-            <a:ext cx="76581" cy="58809"/>
+          <a:xfrm>
+            <a:off x="6583680" y="1371600"/>
+            <a:ext cx="0" cy="3566160"/>
           </a:xfrm>
           <a:prstGeom prst="line">
             <a:avLst/>
           </a:prstGeom>
-          <a:ln w="25400">
+          <a:ln w="7620">
             <a:solidFill>
-              <a:srgbClr val="8EDBD4"/>
+              <a:srgbClr val="2E4756"/>
             </a:solidFill>
           </a:ln>
           <a:effectLst/>
         </p:spPr>
       </p:cxnSp>
-      <p:cxnSp>
-        <p:nvCxnSpPr>
-          <p:cNvPr id="19" name="C4-E18 line 17" descr="sci-ppt:o017"/>
-          <p:cNvCxnSpPr/>
+      <p:sp>
+        <p:nvSpPr>
+          <p:cNvPr id="19" name="C4-E18 text 17" descr="sci-ppt:o017"/>
+          <p:cNvSpPr txBox="1"/>
           <p:nvPr/>
-        </p:nvCxnSpPr>
+        </p:nvSpPr>
         <p:spPr>
-          <a:xfrm flipV="1">
-            <a:off x="2154555" y="2243644"/>
-            <a:ext cx="76581" cy="59478"/>
+          <a:xfrm>
+            <a:off x="6126480" y="5020056"/>
+            <a:ext cx="914400" cy="208407"/>
           </a:xfrm>
-          <a:prstGeom prst="line">
+          <a:prstGeom prst="rect">
             <a:avLst/>
           </a:prstGeom>
-          <a:ln w="25400">
-            <a:solidFill>
-              <a:srgbClr val="8EDBD4"/>
-            </a:solidFill>
-          </a:ln>
+          <a:noFill/>
           <a:effectLst/>
         </p:spPr>
-      </p:cxnSp>
+        <p:txBody>
+          <a:bodyPr wrap="none" lIns="18288" rIns="18288" tIns="18288" bIns="18288" anchor="t">
+            <a:spAutoFit/>
+          </a:bodyPr>
+          <a:lstStyle/>
+          <a:p>
+            <a:pPr algn="ctr">
+              <a:spcAft>
+                <a:spcPts val="0"/>
+              </a:spcAft>
+            </a:pPr>
+            <a:r>
+              <a:rPr sz="1050" b="0" i="0">
+                <a:solidFill>
+                  <a:srgbClr val="B4C7D2"/>
+                </a:solidFill>
+                <a:latin typeface="Arial"/>
+              </a:rPr>
+              <a:t>1.00</a:t>
+            </a:r>
+          </a:p>
+        </p:txBody>
+      </p:sp>
       <p:cxnSp>
         <p:nvCxnSpPr>
           <p:cNvPr id="20" name="C4-E18 line 18" descr="sci-ppt:o018"/>
@@ -3517,16 +3607,16 @@
           <p:nvPr/>
         </p:nvCxnSpPr>
         <p:spPr>
-          <a:xfrm flipV="1">
-            <a:off x="2231136" y="2183855"/>
-            <a:ext cx="76581" cy="59789"/>
+          <a:xfrm>
+            <a:off x="850392" y="4937760"/>
+            <a:ext cx="64008" cy="0"/>
           </a:xfrm>
           <a:prstGeom prst="line">
             <a:avLst/>
           </a:prstGeom>
-          <a:ln w="25400">
+          <a:ln w="12700">
             <a:solidFill>
-              <a:srgbClr val="8EDBD4"/>
+              <a:srgbClr val="B4C7D2"/>
             </a:solidFill>
           </a:ln>
           <a:effectLst/>
@@ -3539,16 +3629,16 @@
           <p:nvPr/>
         </p:nvCxnSpPr>
         <p:spPr>
-          <a:xfrm flipV="1">
-            <a:off x="2307717" y="2124095"/>
-            <a:ext cx="76581" cy="59760"/>
+          <a:xfrm>
+            <a:off x="850392" y="3316778"/>
+            <a:ext cx="64008" cy="0"/>
           </a:xfrm>
           <a:prstGeom prst="line">
             <a:avLst/>
           </a:prstGeom>
-          <a:ln w="25400">
+          <a:ln w="12700">
             <a:solidFill>
-              <a:srgbClr val="8EDBD4"/>
+              <a:srgbClr val="B4C7D2"/>
             </a:solidFill>
           </a:ln>
           <a:effectLst/>
@@ -3561,43 +3651,61 @@
           <p:nvPr/>
         </p:nvCxnSpPr>
         <p:spPr>
-          <a:xfrm flipV="1">
-            <a:off x="2384298" y="2064694"/>
-            <a:ext cx="76581" cy="59401"/>
+          <a:xfrm>
+            <a:off x="914400" y="3316778"/>
+            <a:ext cx="5669280" cy="0"/>
           </a:xfrm>
           <a:prstGeom prst="line">
             <a:avLst/>
           </a:prstGeom>
-          <a:ln w="25400">
+          <a:ln w="7620">
             <a:solidFill>
-              <a:srgbClr val="8EDBD4"/>
+              <a:srgbClr val="2E4756"/>
             </a:solidFill>
           </a:ln>
           <a:effectLst/>
         </p:spPr>
       </p:cxnSp>
-      <p:cxnSp>
-        <p:nvCxnSpPr>
-          <p:cNvPr id="23" name="C4-E18 line 21" descr="sci-ppt:o021"/>
-          <p:cNvCxnSpPr/>
+      <p:sp>
+        <p:nvSpPr>
+          <p:cNvPr id="23" name="C4-E18 text 21" descr="sci-ppt:o021"/>
+          <p:cNvSpPr txBox="1"/>
           <p:nvPr/>
-        </p:nvCxnSpPr>
+        </p:nvSpPr>
         <p:spPr>
-          <a:xfrm flipV="1">
-            <a:off x="2460879" y="2005965"/>
-            <a:ext cx="76581" cy="58729"/>
+          <a:xfrm>
+            <a:off x="45720" y="3234482"/>
+            <a:ext cx="777240" cy="208407"/>
           </a:xfrm>
-          <a:prstGeom prst="line">
+          <a:prstGeom prst="rect">
             <a:avLst/>
           </a:prstGeom>
-          <a:ln w="25400">
-            <a:solidFill>
-              <a:srgbClr val="8EDBD4"/>
-            </a:solidFill>
-          </a:ln>
+          <a:noFill/>
           <a:effectLst/>
         </p:spPr>
-      </p:cxnSp>
+        <p:txBody>
+          <a:bodyPr wrap="none" lIns="18288" rIns="18288" tIns="18288" bIns="18288" anchor="t">
+            <a:spAutoFit/>
+          </a:bodyPr>
+          <a:lstStyle/>
+          <a:p>
+            <a:pPr algn="r">
+              <a:spcAft>
+                <a:spcPts val="0"/>
+              </a:spcAft>
+            </a:pPr>
+            <a:r>
+              <a:rPr sz="1050" b="0" i="0">
+                <a:solidFill>
+                  <a:srgbClr val="B4C7D2"/>
+                </a:solidFill>
+                <a:latin typeface="Arial"/>
+              </a:rPr>
+              <a:t>1</a:t>
+            </a:r>
+          </a:p>
+        </p:txBody>
+      </p:sp>
       <p:cxnSp>
         <p:nvCxnSpPr>
           <p:cNvPr id="24" name="C4-E18 line 22" descr="sci-ppt:o022"/>
@@ -3605,16 +3713,16 @@
           <p:nvPr/>
         </p:nvCxnSpPr>
         <p:spPr>
-          <a:xfrm flipV="1">
-            <a:off x="2537460" y="1948205"/>
-            <a:ext cx="76581" cy="57760"/>
+          <a:xfrm>
+            <a:off x="850392" y="1695796"/>
+            <a:ext cx="64008" cy="0"/>
           </a:xfrm>
           <a:prstGeom prst="line">
             <a:avLst/>
           </a:prstGeom>
-          <a:ln w="25400">
+          <a:ln w="12700">
             <a:solidFill>
-              <a:srgbClr val="8EDBD4"/>
+              <a:srgbClr val="B4C7D2"/>
             </a:solidFill>
           </a:ln>
           <a:effectLst/>
@@ -3627,1395 +3735,31 @@
           <p:nvPr/>
         </p:nvCxnSpPr>
         <p:spPr>
-          <a:xfrm flipV="1">
-            <a:off x="2614041" y="1891701"/>
-            <a:ext cx="76581" cy="56504"/>
+          <a:xfrm>
+            <a:off x="914400" y="1695796"/>
+            <a:ext cx="5669280" cy="0"/>
           </a:xfrm>
           <a:prstGeom prst="line">
             <a:avLst/>
           </a:prstGeom>
-          <a:ln w="25400">
+          <a:ln w="7620">
             <a:solidFill>
-              <a:srgbClr val="8EDBD4"/>
+              <a:srgbClr val="2E4756"/>
             </a:solidFill>
           </a:ln>
           <a:effectLst/>
         </p:spPr>
       </p:cxnSp>
-      <p:cxnSp>
-        <p:nvCxnSpPr>
-          <p:cNvPr id="26" name="C4-E18 line 24" descr="sci-ppt:o024"/>
-          <p:cNvCxnSpPr/>
+      <p:sp>
+        <p:nvSpPr>
+          <p:cNvPr id="26" name="C4-E18 text 24" descr="sci-ppt:o024"/>
+          <p:cNvSpPr txBox="1"/>
           <p:nvPr/>
-        </p:nvCxnSpPr>
-        <p:spPr>
-          <a:xfrm flipV="1">
-            <a:off x="2690622" y="1836720"/>
-            <a:ext cx="76581" cy="54981"/>
-          </a:xfrm>
-          <a:prstGeom prst="line">
-            <a:avLst/>
-          </a:prstGeom>
-          <a:ln w="25400">
-            <a:solidFill>
-              <a:srgbClr val="8EDBD4"/>
-            </a:solidFill>
-          </a:ln>
-          <a:effectLst/>
-        </p:spPr>
-      </p:cxnSp>
-      <p:cxnSp>
-        <p:nvCxnSpPr>
-          <p:cNvPr id="27" name="C4-E18 line 25" descr="sci-ppt:o025"/>
-          <p:cNvCxnSpPr/>
-          <p:nvPr/>
-        </p:nvCxnSpPr>
-        <p:spPr>
-          <a:xfrm flipV="1">
-            <a:off x="2767203" y="1783518"/>
-            <a:ext cx="76581" cy="53202"/>
-          </a:xfrm>
-          <a:prstGeom prst="line">
-            <a:avLst/>
-          </a:prstGeom>
-          <a:ln w="25400">
-            <a:solidFill>
-              <a:srgbClr val="8EDBD4"/>
-            </a:solidFill>
-          </a:ln>
-          <a:effectLst/>
-        </p:spPr>
-      </p:cxnSp>
-      <p:cxnSp>
-        <p:nvCxnSpPr>
-          <p:cNvPr id="28" name="C4-E18 line 26" descr="sci-ppt:o026"/>
-          <p:cNvCxnSpPr/>
-          <p:nvPr/>
-        </p:nvCxnSpPr>
-        <p:spPr>
-          <a:xfrm flipV="1">
-            <a:off x="2843784" y="1732337"/>
-            <a:ext cx="76581" cy="51181"/>
-          </a:xfrm>
-          <a:prstGeom prst="line">
-            <a:avLst/>
-          </a:prstGeom>
-          <a:ln w="25400">
-            <a:solidFill>
-              <a:srgbClr val="8EDBD4"/>
-            </a:solidFill>
-          </a:ln>
-          <a:effectLst/>
-        </p:spPr>
-      </p:cxnSp>
-      <p:cxnSp>
-        <p:nvCxnSpPr>
-          <p:cNvPr id="29" name="C4-E18 line 27" descr="sci-ppt:o027"/>
-          <p:cNvCxnSpPr/>
-          <p:nvPr/>
-        </p:nvCxnSpPr>
-        <p:spPr>
-          <a:xfrm flipV="1">
-            <a:off x="2920365" y="1683400"/>
-            <a:ext cx="76581" cy="48937"/>
-          </a:xfrm>
-          <a:prstGeom prst="line">
-            <a:avLst/>
-          </a:prstGeom>
-          <a:ln w="25400">
-            <a:solidFill>
-              <a:srgbClr val="8EDBD4"/>
-            </a:solidFill>
-          </a:ln>
-          <a:effectLst/>
-        </p:spPr>
-      </p:cxnSp>
-      <p:cxnSp>
-        <p:nvCxnSpPr>
-          <p:cNvPr id="30" name="C4-E18 line 28" descr="sci-ppt:o028"/>
-          <p:cNvCxnSpPr/>
-          <p:nvPr/>
-        </p:nvCxnSpPr>
-        <p:spPr>
-          <a:xfrm flipV="1">
-            <a:off x="2996946" y="1636921"/>
-            <a:ext cx="76581" cy="46479"/>
-          </a:xfrm>
-          <a:prstGeom prst="line">
-            <a:avLst/>
-          </a:prstGeom>
-          <a:ln w="25400">
-            <a:solidFill>
-              <a:srgbClr val="8EDBD4"/>
-            </a:solidFill>
-          </a:ln>
-          <a:effectLst/>
-        </p:spPr>
-      </p:cxnSp>
-      <p:cxnSp>
-        <p:nvCxnSpPr>
-          <p:cNvPr id="31" name="C4-E18 line 29" descr="sci-ppt:o029"/>
-          <p:cNvCxnSpPr/>
-          <p:nvPr/>
-        </p:nvCxnSpPr>
-        <p:spPr>
-          <a:xfrm flipV="1">
-            <a:off x="3073527" y="1593095"/>
-            <a:ext cx="76581" cy="43826"/>
-          </a:xfrm>
-          <a:prstGeom prst="line">
-            <a:avLst/>
-          </a:prstGeom>
-          <a:ln w="25400">
-            <a:solidFill>
-              <a:srgbClr val="8EDBD4"/>
-            </a:solidFill>
-          </a:ln>
-          <a:effectLst/>
-        </p:spPr>
-      </p:cxnSp>
-      <p:cxnSp>
-        <p:nvCxnSpPr>
-          <p:cNvPr id="32" name="C4-E18 line 30" descr="sci-ppt:o030"/>
-          <p:cNvCxnSpPr/>
-          <p:nvPr/>
-        </p:nvCxnSpPr>
-        <p:spPr>
-          <a:xfrm flipV="1">
-            <a:off x="3150108" y="1552104"/>
-            <a:ext cx="76581" cy="40991"/>
-          </a:xfrm>
-          <a:prstGeom prst="line">
-            <a:avLst/>
-          </a:prstGeom>
-          <a:ln w="25400">
-            <a:solidFill>
-              <a:srgbClr val="8EDBD4"/>
-            </a:solidFill>
-          </a:ln>
-          <a:effectLst/>
-        </p:spPr>
-      </p:cxnSp>
-      <p:cxnSp>
-        <p:nvCxnSpPr>
-          <p:cNvPr id="33" name="C4-E18 line 31" descr="sci-ppt:o031"/>
-          <p:cNvCxnSpPr/>
-          <p:nvPr/>
-        </p:nvCxnSpPr>
-        <p:spPr>
-          <a:xfrm flipV="1">
-            <a:off x="3226689" y="1514117"/>
-            <a:ext cx="76581" cy="37987"/>
-          </a:xfrm>
-          <a:prstGeom prst="line">
-            <a:avLst/>
-          </a:prstGeom>
-          <a:ln w="25400">
-            <a:solidFill>
-              <a:srgbClr val="8EDBD4"/>
-            </a:solidFill>
-          </a:ln>
-          <a:effectLst/>
-        </p:spPr>
-      </p:cxnSp>
-      <p:cxnSp>
-        <p:nvCxnSpPr>
-          <p:cNvPr id="34" name="C4-E18 line 32" descr="sci-ppt:o032"/>
-          <p:cNvCxnSpPr/>
-          <p:nvPr/>
-        </p:nvCxnSpPr>
-        <p:spPr>
-          <a:xfrm flipV="1">
-            <a:off x="3303270" y="1479287"/>
-            <a:ext cx="76581" cy="34830"/>
-          </a:xfrm>
-          <a:prstGeom prst="line">
-            <a:avLst/>
-          </a:prstGeom>
-          <a:ln w="25400">
-            <a:solidFill>
-              <a:srgbClr val="8EDBD4"/>
-            </a:solidFill>
-          </a:ln>
-          <a:effectLst/>
-        </p:spPr>
-      </p:cxnSp>
-      <p:cxnSp>
-        <p:nvCxnSpPr>
-          <p:cNvPr id="35" name="C4-E18 line 33" descr="sci-ppt:o033"/>
-          <p:cNvCxnSpPr/>
-          <p:nvPr/>
-        </p:nvCxnSpPr>
-        <p:spPr>
-          <a:xfrm flipV="1">
-            <a:off x="3379851" y="1447751"/>
-            <a:ext cx="76581" cy="31536"/>
-          </a:xfrm>
-          <a:prstGeom prst="line">
-            <a:avLst/>
-          </a:prstGeom>
-          <a:ln w="25400">
-            <a:solidFill>
-              <a:srgbClr val="8EDBD4"/>
-            </a:solidFill>
-          </a:ln>
-          <a:effectLst/>
-        </p:spPr>
-      </p:cxnSp>
-      <p:cxnSp>
-        <p:nvCxnSpPr>
-          <p:cNvPr id="36" name="C4-E18 line 34" descr="sci-ppt:o034"/>
-          <p:cNvCxnSpPr/>
-          <p:nvPr/>
-        </p:nvCxnSpPr>
-        <p:spPr>
-          <a:xfrm flipV="1">
-            <a:off x="3456432" y="1419633"/>
-            <a:ext cx="76581" cy="28118"/>
-          </a:xfrm>
-          <a:prstGeom prst="line">
-            <a:avLst/>
-          </a:prstGeom>
-          <a:ln w="25400">
-            <a:solidFill>
-              <a:srgbClr val="8EDBD4"/>
-            </a:solidFill>
-          </a:ln>
-          <a:effectLst/>
-        </p:spPr>
-      </p:cxnSp>
-      <p:cxnSp>
-        <p:nvCxnSpPr>
-          <p:cNvPr id="37" name="C4-E18 line 35" descr="sci-ppt:o035"/>
-          <p:cNvCxnSpPr/>
-          <p:nvPr/>
-        </p:nvCxnSpPr>
-        <p:spPr>
-          <a:xfrm flipV="1">
-            <a:off x="3533013" y="1395044"/>
-            <a:ext cx="76581" cy="24589"/>
-          </a:xfrm>
-          <a:prstGeom prst="line">
-            <a:avLst/>
-          </a:prstGeom>
-          <a:ln w="25400">
-            <a:solidFill>
-              <a:srgbClr val="8EDBD4"/>
-            </a:solidFill>
-          </a:ln>
-          <a:effectLst/>
-        </p:spPr>
-      </p:cxnSp>
-      <p:cxnSp>
-        <p:nvCxnSpPr>
-          <p:cNvPr id="38" name="C4-E18 line 36" descr="sci-ppt:o036"/>
-          <p:cNvCxnSpPr/>
-          <p:nvPr/>
-        </p:nvCxnSpPr>
-        <p:spPr>
-          <a:xfrm flipV="1">
-            <a:off x="3609594" y="1374077"/>
-            <a:ext cx="76581" cy="20967"/>
-          </a:xfrm>
-          <a:prstGeom prst="line">
-            <a:avLst/>
-          </a:prstGeom>
-          <a:ln w="25400">
-            <a:solidFill>
-              <a:srgbClr val="8EDBD4"/>
-            </a:solidFill>
-          </a:ln>
-          <a:effectLst/>
-        </p:spPr>
-      </p:cxnSp>
-      <p:cxnSp>
-        <p:nvCxnSpPr>
-          <p:cNvPr id="39" name="C4-E18 line 37" descr="sci-ppt:o037"/>
-          <p:cNvCxnSpPr/>
-          <p:nvPr/>
-        </p:nvCxnSpPr>
-        <p:spPr>
-          <a:xfrm flipV="1">
-            <a:off x="3686175" y="1356814"/>
-            <a:ext cx="76581" cy="17263"/>
-          </a:xfrm>
-          <a:prstGeom prst="line">
-            <a:avLst/>
-          </a:prstGeom>
-          <a:ln w="25400">
-            <a:solidFill>
-              <a:srgbClr val="8EDBD4"/>
-            </a:solidFill>
-          </a:ln>
-          <a:effectLst/>
-        </p:spPr>
-      </p:cxnSp>
-      <p:cxnSp>
-        <p:nvCxnSpPr>
-          <p:cNvPr id="40" name="C4-E18 line 38" descr="sci-ppt:o038"/>
-          <p:cNvCxnSpPr/>
-          <p:nvPr/>
-        </p:nvCxnSpPr>
-        <p:spPr>
-          <a:xfrm flipV="1">
-            <a:off x="3762756" y="1343318"/>
-            <a:ext cx="76581" cy="13496"/>
-          </a:xfrm>
-          <a:prstGeom prst="line">
-            <a:avLst/>
-          </a:prstGeom>
-          <a:ln w="25400">
-            <a:solidFill>
-              <a:srgbClr val="8EDBD4"/>
-            </a:solidFill>
-          </a:ln>
-          <a:effectLst/>
-        </p:spPr>
-      </p:cxnSp>
-      <p:cxnSp>
-        <p:nvCxnSpPr>
-          <p:cNvPr id="41" name="C4-E18 line 39" descr="sci-ppt:o039"/>
-          <p:cNvCxnSpPr/>
-          <p:nvPr/>
-        </p:nvCxnSpPr>
-        <p:spPr>
-          <a:xfrm flipV="1">
-            <a:off x="3839337" y="1333642"/>
-            <a:ext cx="76581" cy="9676"/>
-          </a:xfrm>
-          <a:prstGeom prst="line">
-            <a:avLst/>
-          </a:prstGeom>
-          <a:ln w="25400">
-            <a:solidFill>
-              <a:srgbClr val="8EDBD4"/>
-            </a:solidFill>
-          </a:ln>
-          <a:effectLst/>
-        </p:spPr>
-      </p:cxnSp>
-      <p:cxnSp>
-        <p:nvCxnSpPr>
-          <p:cNvPr id="42" name="C4-E18 line 40" descr="sci-ppt:o040"/>
-          <p:cNvCxnSpPr/>
-          <p:nvPr/>
-        </p:nvCxnSpPr>
-        <p:spPr>
-          <a:xfrm flipV="1">
-            <a:off x="3915918" y="1327822"/>
-            <a:ext cx="76581" cy="5820"/>
-          </a:xfrm>
-          <a:prstGeom prst="line">
-            <a:avLst/>
-          </a:prstGeom>
-          <a:ln w="25400">
-            <a:solidFill>
-              <a:srgbClr val="8EDBD4"/>
-            </a:solidFill>
-          </a:ln>
-          <a:effectLst/>
-        </p:spPr>
-      </p:cxnSp>
-      <p:cxnSp>
-        <p:nvCxnSpPr>
-          <p:cNvPr id="43" name="C4-E18 line 41" descr="sci-ppt:o041"/>
-          <p:cNvCxnSpPr/>
-          <p:nvPr/>
-        </p:nvCxnSpPr>
-        <p:spPr>
-          <a:xfrm flipV="1">
-            <a:off x="3992499" y="1325880"/>
-            <a:ext cx="76581" cy="1942"/>
-          </a:xfrm>
-          <a:prstGeom prst="line">
-            <a:avLst/>
-          </a:prstGeom>
-          <a:ln w="25400">
-            <a:solidFill>
-              <a:srgbClr val="8EDBD4"/>
-            </a:solidFill>
-          </a:ln>
-          <a:effectLst/>
-        </p:spPr>
-      </p:cxnSp>
-      <p:cxnSp>
-        <p:nvCxnSpPr>
-          <p:cNvPr id="44" name="C4-E18 line 42" descr="sci-ppt:o042"/>
-          <p:cNvCxnSpPr/>
-          <p:nvPr/>
-        </p:nvCxnSpPr>
+        </p:nvSpPr>
         <p:spPr>
           <a:xfrm>
-            <a:off x="4069080" y="1325880"/>
-            <a:ext cx="76580" cy="1942"/>
-          </a:xfrm>
-          <a:prstGeom prst="line">
-            <a:avLst/>
-          </a:prstGeom>
-          <a:ln w="25400">
-            <a:solidFill>
-              <a:srgbClr val="8EDBD4"/>
-            </a:solidFill>
-          </a:ln>
-          <a:effectLst/>
-        </p:spPr>
-      </p:cxnSp>
-      <p:cxnSp>
-        <p:nvCxnSpPr>
-          <p:cNvPr id="45" name="C4-E18 line 43" descr="sci-ppt:o043"/>
-          <p:cNvCxnSpPr/>
-          <p:nvPr/>
-        </p:nvCxnSpPr>
-        <p:spPr>
-          <a:xfrm>
-            <a:off x="4145660" y="1327822"/>
-            <a:ext cx="76582" cy="5820"/>
-          </a:xfrm>
-          <a:prstGeom prst="line">
-            <a:avLst/>
-          </a:prstGeom>
-          <a:ln w="25400">
-            <a:solidFill>
-              <a:srgbClr val="8EDBD4"/>
-            </a:solidFill>
-          </a:ln>
-          <a:effectLst/>
-        </p:spPr>
-      </p:cxnSp>
-      <p:cxnSp>
-        <p:nvCxnSpPr>
-          <p:cNvPr id="46" name="C4-E18 line 44" descr="sci-ppt:o044"/>
-          <p:cNvCxnSpPr/>
-          <p:nvPr/>
-        </p:nvCxnSpPr>
-        <p:spPr>
-          <a:xfrm>
-            <a:off x="4222242" y="1333642"/>
-            <a:ext cx="76581" cy="9676"/>
-          </a:xfrm>
-          <a:prstGeom prst="line">
-            <a:avLst/>
-          </a:prstGeom>
-          <a:ln w="25400">
-            <a:solidFill>
-              <a:srgbClr val="8EDBD4"/>
-            </a:solidFill>
-          </a:ln>
-          <a:effectLst/>
-        </p:spPr>
-      </p:cxnSp>
-      <p:cxnSp>
-        <p:nvCxnSpPr>
-          <p:cNvPr id="47" name="C4-E18 line 45" descr="sci-ppt:o045"/>
-          <p:cNvCxnSpPr/>
-          <p:nvPr/>
-        </p:nvCxnSpPr>
-        <p:spPr>
-          <a:xfrm>
-            <a:off x="4298823" y="1343318"/>
-            <a:ext cx="76581" cy="13496"/>
-          </a:xfrm>
-          <a:prstGeom prst="line">
-            <a:avLst/>
-          </a:prstGeom>
-          <a:ln w="25400">
-            <a:solidFill>
-              <a:srgbClr val="8EDBD4"/>
-            </a:solidFill>
-          </a:ln>
-          <a:effectLst/>
-        </p:spPr>
-      </p:cxnSp>
-      <p:cxnSp>
-        <p:nvCxnSpPr>
-          <p:cNvPr id="48" name="C4-E18 line 46" descr="sci-ppt:o046"/>
-          <p:cNvCxnSpPr/>
-          <p:nvPr/>
-        </p:nvCxnSpPr>
-        <p:spPr>
-          <a:xfrm>
-            <a:off x="4375404" y="1356814"/>
-            <a:ext cx="76581" cy="17263"/>
-          </a:xfrm>
-          <a:prstGeom prst="line">
-            <a:avLst/>
-          </a:prstGeom>
-          <a:ln w="25400">
-            <a:solidFill>
-              <a:srgbClr val="8EDBD4"/>
-            </a:solidFill>
-          </a:ln>
-          <a:effectLst/>
-        </p:spPr>
-      </p:cxnSp>
-      <p:cxnSp>
-        <p:nvCxnSpPr>
-          <p:cNvPr id="49" name="C4-E18 line 47" descr="sci-ppt:o047"/>
-          <p:cNvCxnSpPr/>
-          <p:nvPr/>
-        </p:nvCxnSpPr>
-        <p:spPr>
-          <a:xfrm>
-            <a:off x="4451985" y="1374077"/>
-            <a:ext cx="76581" cy="20967"/>
-          </a:xfrm>
-          <a:prstGeom prst="line">
-            <a:avLst/>
-          </a:prstGeom>
-          <a:ln w="25400">
-            <a:solidFill>
-              <a:srgbClr val="8EDBD4"/>
-            </a:solidFill>
-          </a:ln>
-          <a:effectLst/>
-        </p:spPr>
-      </p:cxnSp>
-      <p:cxnSp>
-        <p:nvCxnSpPr>
-          <p:cNvPr id="50" name="C4-E18 line 48" descr="sci-ppt:o048"/>
-          <p:cNvCxnSpPr/>
-          <p:nvPr/>
-        </p:nvCxnSpPr>
-        <p:spPr>
-          <a:xfrm>
-            <a:off x="4528566" y="1395044"/>
-            <a:ext cx="76581" cy="24589"/>
-          </a:xfrm>
-          <a:prstGeom prst="line">
-            <a:avLst/>
-          </a:prstGeom>
-          <a:ln w="25400">
-            <a:solidFill>
-              <a:srgbClr val="8EDBD4"/>
-            </a:solidFill>
-          </a:ln>
-          <a:effectLst/>
-        </p:spPr>
-      </p:cxnSp>
-      <p:cxnSp>
-        <p:nvCxnSpPr>
-          <p:cNvPr id="51" name="C4-E18 line 49" descr="sci-ppt:o049"/>
-          <p:cNvCxnSpPr/>
-          <p:nvPr/>
-        </p:nvCxnSpPr>
-        <p:spPr>
-          <a:xfrm>
-            <a:off x="4605147" y="1419633"/>
-            <a:ext cx="76581" cy="28118"/>
-          </a:xfrm>
-          <a:prstGeom prst="line">
-            <a:avLst/>
-          </a:prstGeom>
-          <a:ln w="25400">
-            <a:solidFill>
-              <a:srgbClr val="8EDBD4"/>
-            </a:solidFill>
-          </a:ln>
-          <a:effectLst/>
-        </p:spPr>
-      </p:cxnSp>
-      <p:cxnSp>
-        <p:nvCxnSpPr>
-          <p:cNvPr id="52" name="C4-E18 line 50" descr="sci-ppt:o050"/>
-          <p:cNvCxnSpPr/>
-          <p:nvPr/>
-        </p:nvCxnSpPr>
-        <p:spPr>
-          <a:xfrm>
-            <a:off x="4681728" y="1447751"/>
-            <a:ext cx="76580" cy="31536"/>
-          </a:xfrm>
-          <a:prstGeom prst="line">
-            <a:avLst/>
-          </a:prstGeom>
-          <a:ln w="25400">
-            <a:solidFill>
-              <a:srgbClr val="8EDBD4"/>
-            </a:solidFill>
-          </a:ln>
-          <a:effectLst/>
-        </p:spPr>
-      </p:cxnSp>
-      <p:cxnSp>
-        <p:nvCxnSpPr>
-          <p:cNvPr id="53" name="C4-E18 line 51" descr="sci-ppt:o051"/>
-          <p:cNvCxnSpPr/>
-          <p:nvPr/>
-        </p:nvCxnSpPr>
-        <p:spPr>
-          <a:xfrm>
-            <a:off x="4758308" y="1479287"/>
-            <a:ext cx="76582" cy="34830"/>
-          </a:xfrm>
-          <a:prstGeom prst="line">
-            <a:avLst/>
-          </a:prstGeom>
-          <a:ln w="25400">
-            <a:solidFill>
-              <a:srgbClr val="8EDBD4"/>
-            </a:solidFill>
-          </a:ln>
-          <a:effectLst/>
-        </p:spPr>
-      </p:cxnSp>
-      <p:cxnSp>
-        <p:nvCxnSpPr>
-          <p:cNvPr id="54" name="C4-E18 line 52" descr="sci-ppt:o052"/>
-          <p:cNvCxnSpPr/>
-          <p:nvPr/>
-        </p:nvCxnSpPr>
-        <p:spPr>
-          <a:xfrm>
-            <a:off x="4834890" y="1514117"/>
-            <a:ext cx="76581" cy="37987"/>
-          </a:xfrm>
-          <a:prstGeom prst="line">
-            <a:avLst/>
-          </a:prstGeom>
-          <a:ln w="25400">
-            <a:solidFill>
-              <a:srgbClr val="8EDBD4"/>
-            </a:solidFill>
-          </a:ln>
-          <a:effectLst/>
-        </p:spPr>
-      </p:cxnSp>
-      <p:cxnSp>
-        <p:nvCxnSpPr>
-          <p:cNvPr id="55" name="C4-E18 line 53" descr="sci-ppt:o053"/>
-          <p:cNvCxnSpPr/>
-          <p:nvPr/>
-        </p:nvCxnSpPr>
-        <p:spPr>
-          <a:xfrm>
-            <a:off x="4911471" y="1552104"/>
-            <a:ext cx="76581" cy="40991"/>
-          </a:xfrm>
-          <a:prstGeom prst="line">
-            <a:avLst/>
-          </a:prstGeom>
-          <a:ln w="25400">
-            <a:solidFill>
-              <a:srgbClr val="8EDBD4"/>
-            </a:solidFill>
-          </a:ln>
-          <a:effectLst/>
-        </p:spPr>
-      </p:cxnSp>
-      <p:cxnSp>
-        <p:nvCxnSpPr>
-          <p:cNvPr id="56" name="C4-E18 line 54" descr="sci-ppt:o054"/>
-          <p:cNvCxnSpPr/>
-          <p:nvPr/>
-        </p:nvCxnSpPr>
-        <p:spPr>
-          <a:xfrm>
-            <a:off x="4988052" y="1593095"/>
-            <a:ext cx="76581" cy="43826"/>
-          </a:xfrm>
-          <a:prstGeom prst="line">
-            <a:avLst/>
-          </a:prstGeom>
-          <a:ln w="25400">
-            <a:solidFill>
-              <a:srgbClr val="8EDBD4"/>
-            </a:solidFill>
-          </a:ln>
-          <a:effectLst/>
-        </p:spPr>
-      </p:cxnSp>
-      <p:cxnSp>
-        <p:nvCxnSpPr>
-          <p:cNvPr id="57" name="C4-E18 line 55" descr="sci-ppt:o055"/>
-          <p:cNvCxnSpPr/>
-          <p:nvPr/>
-        </p:nvCxnSpPr>
-        <p:spPr>
-          <a:xfrm>
-            <a:off x="5064633" y="1636921"/>
-            <a:ext cx="76581" cy="46479"/>
-          </a:xfrm>
-          <a:prstGeom prst="line">
-            <a:avLst/>
-          </a:prstGeom>
-          <a:ln w="25400">
-            <a:solidFill>
-              <a:srgbClr val="8EDBD4"/>
-            </a:solidFill>
-          </a:ln>
-          <a:effectLst/>
-        </p:spPr>
-      </p:cxnSp>
-      <p:cxnSp>
-        <p:nvCxnSpPr>
-          <p:cNvPr id="58" name="C4-E18 line 56" descr="sci-ppt:o056"/>
-          <p:cNvCxnSpPr/>
-          <p:nvPr/>
-        </p:nvCxnSpPr>
-        <p:spPr>
-          <a:xfrm>
-            <a:off x="5141214" y="1683400"/>
-            <a:ext cx="76581" cy="48937"/>
-          </a:xfrm>
-          <a:prstGeom prst="line">
-            <a:avLst/>
-          </a:prstGeom>
-          <a:ln w="25400">
-            <a:solidFill>
-              <a:srgbClr val="8EDBD4"/>
-            </a:solidFill>
-          </a:ln>
-          <a:effectLst/>
-        </p:spPr>
-      </p:cxnSp>
-      <p:cxnSp>
-        <p:nvCxnSpPr>
-          <p:cNvPr id="59" name="C4-E18 line 57" descr="sci-ppt:o057"/>
-          <p:cNvCxnSpPr/>
-          <p:nvPr/>
-        </p:nvCxnSpPr>
-        <p:spPr>
-          <a:xfrm>
-            <a:off x="5217795" y="1732337"/>
-            <a:ext cx="76580" cy="51181"/>
-          </a:xfrm>
-          <a:prstGeom prst="line">
-            <a:avLst/>
-          </a:prstGeom>
-          <a:ln w="25400">
-            <a:solidFill>
-              <a:srgbClr val="8EDBD4"/>
-            </a:solidFill>
-          </a:ln>
-          <a:effectLst/>
-        </p:spPr>
-      </p:cxnSp>
-      <p:cxnSp>
-        <p:nvCxnSpPr>
-          <p:cNvPr id="60" name="C4-E18 line 58" descr="sci-ppt:o058"/>
-          <p:cNvCxnSpPr/>
-          <p:nvPr/>
-        </p:nvCxnSpPr>
-        <p:spPr>
-          <a:xfrm>
-            <a:off x="5294375" y="1783518"/>
-            <a:ext cx="76582" cy="53202"/>
-          </a:xfrm>
-          <a:prstGeom prst="line">
-            <a:avLst/>
-          </a:prstGeom>
-          <a:ln w="25400">
-            <a:solidFill>
-              <a:srgbClr val="8EDBD4"/>
-            </a:solidFill>
-          </a:ln>
-          <a:effectLst/>
-        </p:spPr>
-      </p:cxnSp>
-      <p:cxnSp>
-        <p:nvCxnSpPr>
-          <p:cNvPr id="61" name="C4-E18 line 59" descr="sci-ppt:o059"/>
-          <p:cNvCxnSpPr/>
-          <p:nvPr/>
-        </p:nvCxnSpPr>
-        <p:spPr>
-          <a:xfrm>
-            <a:off x="5370957" y="1836720"/>
-            <a:ext cx="76581" cy="54981"/>
-          </a:xfrm>
-          <a:prstGeom prst="line">
-            <a:avLst/>
-          </a:prstGeom>
-          <a:ln w="25400">
-            <a:solidFill>
-              <a:srgbClr val="8EDBD4"/>
-            </a:solidFill>
-          </a:ln>
-          <a:effectLst/>
-        </p:spPr>
-      </p:cxnSp>
-      <p:cxnSp>
-        <p:nvCxnSpPr>
-          <p:cNvPr id="62" name="C4-E18 line 60" descr="sci-ppt:o060"/>
-          <p:cNvCxnSpPr/>
-          <p:nvPr/>
-        </p:nvCxnSpPr>
-        <p:spPr>
-          <a:xfrm>
-            <a:off x="5447538" y="1891701"/>
-            <a:ext cx="76581" cy="56504"/>
-          </a:xfrm>
-          <a:prstGeom prst="line">
-            <a:avLst/>
-          </a:prstGeom>
-          <a:ln w="25400">
-            <a:solidFill>
-              <a:srgbClr val="8EDBD4"/>
-            </a:solidFill>
-          </a:ln>
-          <a:effectLst/>
-        </p:spPr>
-      </p:cxnSp>
-      <p:cxnSp>
-        <p:nvCxnSpPr>
-          <p:cNvPr id="63" name="C4-E18 line 61" descr="sci-ppt:o061"/>
-          <p:cNvCxnSpPr/>
-          <p:nvPr/>
-        </p:nvCxnSpPr>
-        <p:spPr>
-          <a:xfrm>
-            <a:off x="5524119" y="1948205"/>
-            <a:ext cx="76581" cy="57760"/>
-          </a:xfrm>
-          <a:prstGeom prst="line">
-            <a:avLst/>
-          </a:prstGeom>
-          <a:ln w="25400">
-            <a:solidFill>
-              <a:srgbClr val="8EDBD4"/>
-            </a:solidFill>
-          </a:ln>
-          <a:effectLst/>
-        </p:spPr>
-      </p:cxnSp>
-      <p:cxnSp>
-        <p:nvCxnSpPr>
-          <p:cNvPr id="64" name="C4-E18 line 62" descr="sci-ppt:o062"/>
-          <p:cNvCxnSpPr/>
-          <p:nvPr/>
-        </p:nvCxnSpPr>
-        <p:spPr>
-          <a:xfrm>
-            <a:off x="5600700" y="2005965"/>
-            <a:ext cx="76581" cy="58729"/>
-          </a:xfrm>
-          <a:prstGeom prst="line">
-            <a:avLst/>
-          </a:prstGeom>
-          <a:ln w="25400">
-            <a:solidFill>
-              <a:srgbClr val="8EDBD4"/>
-            </a:solidFill>
-          </a:ln>
-          <a:effectLst/>
-        </p:spPr>
-      </p:cxnSp>
-      <p:cxnSp>
-        <p:nvCxnSpPr>
-          <p:cNvPr id="65" name="C4-E18 line 63" descr="sci-ppt:o063"/>
-          <p:cNvCxnSpPr/>
-          <p:nvPr/>
-        </p:nvCxnSpPr>
-        <p:spPr>
-          <a:xfrm>
-            <a:off x="5677281" y="2064694"/>
-            <a:ext cx="76581" cy="59401"/>
-          </a:xfrm>
-          <a:prstGeom prst="line">
-            <a:avLst/>
-          </a:prstGeom>
-          <a:ln w="25400">
-            <a:solidFill>
-              <a:srgbClr val="8EDBD4"/>
-            </a:solidFill>
-          </a:ln>
-          <a:effectLst/>
-        </p:spPr>
-      </p:cxnSp>
-      <p:cxnSp>
-        <p:nvCxnSpPr>
-          <p:cNvPr id="66" name="C4-E18 line 64" descr="sci-ppt:o064"/>
-          <p:cNvCxnSpPr/>
-          <p:nvPr/>
-        </p:nvCxnSpPr>
-        <p:spPr>
-          <a:xfrm>
-            <a:off x="5753862" y="2124095"/>
-            <a:ext cx="76581" cy="59760"/>
-          </a:xfrm>
-          <a:prstGeom prst="line">
-            <a:avLst/>
-          </a:prstGeom>
-          <a:ln w="25400">
-            <a:solidFill>
-              <a:srgbClr val="8EDBD4"/>
-            </a:solidFill>
-          </a:ln>
-          <a:effectLst/>
-        </p:spPr>
-      </p:cxnSp>
-      <p:cxnSp>
-        <p:nvCxnSpPr>
-          <p:cNvPr id="67" name="C4-E18 line 65" descr="sci-ppt:o065"/>
-          <p:cNvCxnSpPr/>
-          <p:nvPr/>
-        </p:nvCxnSpPr>
-        <p:spPr>
-          <a:xfrm>
-            <a:off x="5830443" y="2183855"/>
-            <a:ext cx="76581" cy="59789"/>
-          </a:xfrm>
-          <a:prstGeom prst="line">
-            <a:avLst/>
-          </a:prstGeom>
-          <a:ln w="25400">
-            <a:solidFill>
-              <a:srgbClr val="8EDBD4"/>
-            </a:solidFill>
-          </a:ln>
-          <a:effectLst/>
-        </p:spPr>
-      </p:cxnSp>
-      <p:cxnSp>
-        <p:nvCxnSpPr>
-          <p:cNvPr id="68" name="C4-E18 line 66" descr="sci-ppt:o066"/>
-          <p:cNvCxnSpPr/>
-          <p:nvPr/>
-        </p:nvCxnSpPr>
-        <p:spPr>
-          <a:xfrm>
-            <a:off x="5907024" y="2243644"/>
-            <a:ext cx="76580" cy="59478"/>
-          </a:xfrm>
-          <a:prstGeom prst="line">
-            <a:avLst/>
-          </a:prstGeom>
-          <a:ln w="25400">
-            <a:solidFill>
-              <a:srgbClr val="8EDBD4"/>
-            </a:solidFill>
-          </a:ln>
-          <a:effectLst/>
-        </p:spPr>
-      </p:cxnSp>
-      <p:cxnSp>
-        <p:nvCxnSpPr>
-          <p:cNvPr id="69" name="C4-E18 line 67" descr="sci-ppt:o067"/>
-          <p:cNvCxnSpPr/>
-          <p:nvPr/>
-        </p:nvCxnSpPr>
-        <p:spPr>
-          <a:xfrm>
-            <a:off x="5983604" y="2303122"/>
-            <a:ext cx="76582" cy="58809"/>
-          </a:xfrm>
-          <a:prstGeom prst="line">
-            <a:avLst/>
-          </a:prstGeom>
-          <a:ln w="25400">
-            <a:solidFill>
-              <a:srgbClr val="8EDBD4"/>
-            </a:solidFill>
-          </a:ln>
-          <a:effectLst/>
-        </p:spPr>
-      </p:cxnSp>
-      <p:cxnSp>
-        <p:nvCxnSpPr>
-          <p:cNvPr id="70" name="C4-E18 line 68" descr="sci-ppt:o068"/>
-          <p:cNvCxnSpPr/>
-          <p:nvPr/>
-        </p:nvCxnSpPr>
-        <p:spPr>
-          <a:xfrm>
-            <a:off x="6060186" y="2361931"/>
-            <a:ext cx="76581" cy="57767"/>
-          </a:xfrm>
-          <a:prstGeom prst="line">
-            <a:avLst/>
-          </a:prstGeom>
-          <a:ln w="25400">
-            <a:solidFill>
-              <a:srgbClr val="8EDBD4"/>
-            </a:solidFill>
-          </a:ln>
-          <a:effectLst/>
-        </p:spPr>
-      </p:cxnSp>
-      <p:cxnSp>
-        <p:nvCxnSpPr>
-          <p:cNvPr id="71" name="C4-E18 line 69" descr="sci-ppt:o069"/>
-          <p:cNvCxnSpPr/>
-          <p:nvPr/>
-        </p:nvCxnSpPr>
-        <p:spPr>
-          <a:xfrm>
-            <a:off x="6136767" y="2419698"/>
-            <a:ext cx="76581" cy="56341"/>
-          </a:xfrm>
-          <a:prstGeom prst="line">
-            <a:avLst/>
-          </a:prstGeom>
-          <a:ln w="25400">
-            <a:solidFill>
-              <a:srgbClr val="8EDBD4"/>
-            </a:solidFill>
-          </a:ln>
-          <a:effectLst/>
-        </p:spPr>
-      </p:cxnSp>
-      <p:cxnSp>
-        <p:nvCxnSpPr>
-          <p:cNvPr id="72" name="C4-E18 line 70" descr="sci-ppt:o070"/>
-          <p:cNvCxnSpPr/>
-          <p:nvPr/>
-        </p:nvCxnSpPr>
-        <p:spPr>
-          <a:xfrm>
-            <a:off x="6213348" y="2476039"/>
-            <a:ext cx="76581" cy="54513"/>
-          </a:xfrm>
-          <a:prstGeom prst="line">
-            <a:avLst/>
-          </a:prstGeom>
-          <a:ln w="25400">
-            <a:solidFill>
-              <a:srgbClr val="8EDBD4"/>
-            </a:solidFill>
-          </a:ln>
-          <a:effectLst/>
-        </p:spPr>
-      </p:cxnSp>
-      <p:cxnSp>
-        <p:nvCxnSpPr>
-          <p:cNvPr id="73" name="C4-E18 line 71" descr="sci-ppt:o071"/>
-          <p:cNvCxnSpPr/>
-          <p:nvPr/>
-        </p:nvCxnSpPr>
-        <p:spPr>
-          <a:xfrm>
-            <a:off x="6289929" y="2530552"/>
-            <a:ext cx="76581" cy="52270"/>
-          </a:xfrm>
-          <a:prstGeom prst="line">
-            <a:avLst/>
-          </a:prstGeom>
-          <a:ln w="25400">
-            <a:solidFill>
-              <a:srgbClr val="8EDBD4"/>
-            </a:solidFill>
-          </a:ln>
-          <a:effectLst/>
-        </p:spPr>
-      </p:cxnSp>
-      <p:cxnSp>
-        <p:nvCxnSpPr>
-          <p:cNvPr id="74" name="C4-E18 line 72" descr="sci-ppt:o072"/>
-          <p:cNvCxnSpPr/>
-          <p:nvPr/>
-        </p:nvCxnSpPr>
-        <p:spPr>
-          <a:xfrm>
-            <a:off x="6366510" y="2582822"/>
-            <a:ext cx="76581" cy="49597"/>
-          </a:xfrm>
-          <a:prstGeom prst="line">
-            <a:avLst/>
-          </a:prstGeom>
-          <a:ln w="25400">
-            <a:solidFill>
-              <a:srgbClr val="8EDBD4"/>
-            </a:solidFill>
-          </a:ln>
-          <a:effectLst/>
-        </p:spPr>
-      </p:cxnSp>
-      <p:cxnSp>
-        <p:nvCxnSpPr>
-          <p:cNvPr id="75" name="C4-E18 line 73" descr="sci-ppt:o073"/>
-          <p:cNvCxnSpPr/>
-          <p:nvPr/>
-        </p:nvCxnSpPr>
-        <p:spPr>
-          <a:xfrm>
-            <a:off x="6443091" y="2632419"/>
-            <a:ext cx="76581" cy="46480"/>
-          </a:xfrm>
-          <a:prstGeom prst="line">
-            <a:avLst/>
-          </a:prstGeom>
-          <a:ln w="25400">
-            <a:solidFill>
-              <a:srgbClr val="8EDBD4"/>
-            </a:solidFill>
-          </a:ln>
-          <a:effectLst/>
-        </p:spPr>
-      </p:cxnSp>
-      <p:cxnSp>
-        <p:nvCxnSpPr>
-          <p:cNvPr id="76" name="C4-E18 line 74" descr="sci-ppt:o074"/>
-          <p:cNvCxnSpPr/>
-          <p:nvPr/>
-        </p:nvCxnSpPr>
-        <p:spPr>
-          <a:xfrm>
-            <a:off x="6519672" y="2678899"/>
-            <a:ext cx="76581" cy="42903"/>
-          </a:xfrm>
-          <a:prstGeom prst="line">
-            <a:avLst/>
-          </a:prstGeom>
-          <a:ln w="25400">
-            <a:solidFill>
-              <a:srgbClr val="8EDBD4"/>
-            </a:solidFill>
-          </a:ln>
-          <a:effectLst/>
-        </p:spPr>
-      </p:cxnSp>
-      <p:cxnSp>
-        <p:nvCxnSpPr>
-          <p:cNvPr id="77" name="C4-E18 line 75" descr="sci-ppt:o075"/>
-          <p:cNvCxnSpPr/>
-          <p:nvPr/>
-        </p:nvCxnSpPr>
-        <p:spPr>
-          <a:xfrm>
-            <a:off x="6596253" y="2721802"/>
-            <a:ext cx="76580" cy="38853"/>
-          </a:xfrm>
-          <a:prstGeom prst="line">
-            <a:avLst/>
-          </a:prstGeom>
-          <a:ln w="25400">
-            <a:solidFill>
-              <a:srgbClr val="8EDBD4"/>
-            </a:solidFill>
-          </a:ln>
-          <a:effectLst/>
-        </p:spPr>
-      </p:cxnSp>
-      <p:cxnSp>
-        <p:nvCxnSpPr>
-          <p:cNvPr id="78" name="C4-E18 line 76" descr="sci-ppt:o076"/>
-          <p:cNvCxnSpPr/>
-          <p:nvPr/>
-        </p:nvCxnSpPr>
-        <p:spPr>
-          <a:xfrm>
-            <a:off x="6672833" y="2760655"/>
-            <a:ext cx="76582" cy="34314"/>
-          </a:xfrm>
-          <a:prstGeom prst="line">
-            <a:avLst/>
-          </a:prstGeom>
-          <a:ln w="25400">
-            <a:solidFill>
-              <a:srgbClr val="8EDBD4"/>
-            </a:solidFill>
-          </a:ln>
-          <a:effectLst/>
-        </p:spPr>
-      </p:cxnSp>
-      <p:cxnSp>
-        <p:nvCxnSpPr>
-          <p:cNvPr id="79" name="C4-E18 line 77" descr="sci-ppt:o077"/>
-          <p:cNvCxnSpPr/>
-          <p:nvPr/>
-        </p:nvCxnSpPr>
-        <p:spPr>
-          <a:xfrm>
-            <a:off x="6749415" y="2794969"/>
-            <a:ext cx="76581" cy="29274"/>
-          </a:xfrm>
-          <a:prstGeom prst="line">
-            <a:avLst/>
-          </a:prstGeom>
-          <a:ln w="25400">
-            <a:solidFill>
-              <a:srgbClr val="8EDBD4"/>
-            </a:solidFill>
-          </a:ln>
-          <a:effectLst/>
-        </p:spPr>
-      </p:cxnSp>
-      <p:cxnSp>
-        <p:nvCxnSpPr>
-          <p:cNvPr id="80" name="C4-E18 line 78" descr="sci-ppt:o078"/>
-          <p:cNvCxnSpPr/>
-          <p:nvPr/>
-        </p:nvCxnSpPr>
-        <p:spPr>
-          <a:xfrm>
-            <a:off x="6825996" y="2824243"/>
-            <a:ext cx="76581" cy="23715"/>
-          </a:xfrm>
-          <a:prstGeom prst="line">
-            <a:avLst/>
-          </a:prstGeom>
-          <a:ln w="25400">
-            <a:solidFill>
-              <a:srgbClr val="8EDBD4"/>
-            </a:solidFill>
-          </a:ln>
-          <a:effectLst/>
-        </p:spPr>
-      </p:cxnSp>
-      <p:cxnSp>
-        <p:nvCxnSpPr>
-          <p:cNvPr id="81" name="C4-E18 line 79" descr="sci-ppt:o079"/>
-          <p:cNvCxnSpPr/>
-          <p:nvPr/>
-        </p:nvCxnSpPr>
-        <p:spPr>
-          <a:xfrm>
-            <a:off x="6902577" y="2847958"/>
-            <a:ext cx="76581" cy="17624"/>
-          </a:xfrm>
-          <a:prstGeom prst="line">
-            <a:avLst/>
-          </a:prstGeom>
-          <a:ln w="25400">
-            <a:solidFill>
-              <a:srgbClr val="8EDBD4"/>
-            </a:solidFill>
-          </a:ln>
-          <a:effectLst/>
-        </p:spPr>
-      </p:cxnSp>
-      <p:cxnSp>
-        <p:nvCxnSpPr>
-          <p:cNvPr id="82" name="C4-E18 line 80" descr="sci-ppt:o080"/>
-          <p:cNvCxnSpPr/>
-          <p:nvPr/>
-        </p:nvCxnSpPr>
-        <p:spPr>
-          <a:xfrm>
-            <a:off x="6979158" y="2865582"/>
-            <a:ext cx="76581" cy="10988"/>
-          </a:xfrm>
-          <a:prstGeom prst="line">
-            <a:avLst/>
-          </a:prstGeom>
-          <a:ln w="25400">
-            <a:solidFill>
-              <a:srgbClr val="8EDBD4"/>
-            </a:solidFill>
-          </a:ln>
-          <a:effectLst/>
-        </p:spPr>
-      </p:cxnSp>
-      <p:cxnSp>
-        <p:nvCxnSpPr>
-          <p:cNvPr id="83" name="C4-E18 line 81" descr="sci-ppt:o081"/>
-          <p:cNvCxnSpPr/>
-          <p:nvPr/>
-        </p:nvCxnSpPr>
-        <p:spPr>
-          <a:xfrm>
-            <a:off x="7055739" y="2876570"/>
-            <a:ext cx="76581" cy="3790"/>
-          </a:xfrm>
-          <a:prstGeom prst="line">
-            <a:avLst/>
-          </a:prstGeom>
-          <a:ln w="25400">
-            <a:solidFill>
-              <a:srgbClr val="8EDBD4"/>
-            </a:solidFill>
-          </a:ln>
-          <a:effectLst/>
-        </p:spPr>
-      </p:cxnSp>
-      <p:sp>
-        <p:nvSpPr>
-          <p:cNvPr id="84" name="C4-E18 rect 82" descr="sci-ppt:o082"/>
-          <p:cNvSpPr/>
-          <p:nvPr/>
-        </p:nvSpPr>
-        <p:spPr>
-          <a:xfrm>
-            <a:off x="777240" y="2651760"/>
-            <a:ext cx="274320" cy="457200"/>
-          </a:xfrm>
-          <a:prstGeom prst="rect">
-            <a:avLst/>
-          </a:prstGeom>
-          <a:solidFill>
-            <a:srgbClr val="213E4B"/>
-          </a:solidFill>
-          <a:ln w="19050">
-            <a:solidFill>
-              <a:srgbClr val="B4C7D2"/>
-            </a:solidFill>
-          </a:ln>
-          <a:effectLst/>
-        </p:spPr>
-        <p:txBody>
-          <a:bodyPr rtlCol="0" anchor="ctr"/>
-          <a:lstStyle/>
-          <a:p>
-            <a:pPr algn="ctr"/>
-          </a:p>
-        </p:txBody>
-      </p:sp>
-      <p:sp>
-        <p:nvSpPr>
-          <p:cNvPr id="85" name="C4-E18 rect 83" descr="sci-ppt:o083"/>
-          <p:cNvSpPr/>
-          <p:nvPr/>
-        </p:nvSpPr>
-        <p:spPr>
-          <a:xfrm>
-            <a:off x="7086600" y="2651760"/>
-            <a:ext cx="274320" cy="457200"/>
-          </a:xfrm>
-          <a:prstGeom prst="rect">
-            <a:avLst/>
-          </a:prstGeom>
-          <a:solidFill>
-            <a:srgbClr val="213E4B"/>
-          </a:solidFill>
-          <a:ln w="19050">
-            <a:solidFill>
-              <a:srgbClr val="B4C7D2"/>
-            </a:solidFill>
-          </a:ln>
-          <a:effectLst/>
-        </p:spPr>
-        <p:txBody>
-          <a:bodyPr rtlCol="0" anchor="ctr"/>
-          <a:lstStyle/>
-          <a:p>
-            <a:pPr algn="ctr"/>
-          </a:p>
-        </p:txBody>
-      </p:sp>
-      <p:cxnSp>
-        <p:nvCxnSpPr>
-          <p:cNvPr id="86" name="C4-E18 arrow 84" descr="sci-ppt:o084"/>
-          <p:cNvCxnSpPr/>
-          <p:nvPr/>
-        </p:nvCxnSpPr>
-        <p:spPr>
-          <a:xfrm flipV="1">
-            <a:off x="4069080" y="1371600"/>
-            <a:ext cx="0" cy="1463040"/>
-          </a:xfrm>
-          <a:prstGeom prst="line">
-            <a:avLst/>
-          </a:prstGeom>
-          <a:ln w="25400">
-            <a:solidFill>
-              <a:srgbClr val="8EDBD4"/>
-            </a:solidFill>
-            <a:headEnd type="none" w="med" len="med"/>
-            <a:tailEnd type="triangle" w="med" len="med"/>
-          </a:ln>
-          <a:effectLst/>
-        </p:spPr>
-      </p:cxnSp>
-      <p:sp>
-        <p:nvSpPr>
-          <p:cNvPr id="87" name="C4-E18 text 85" descr="sci-ppt:o085"/>
-          <p:cNvSpPr txBox="1"/>
-          <p:nvPr/>
-        </p:nvSpPr>
-        <p:spPr>
-          <a:xfrm>
-            <a:off x="4206240" y="1920240"/>
-            <a:ext cx="2560320" cy="411480"/>
+            <a:off x="45720" y="1613500"/>
+            <a:ext cx="777240" cy="208407"/>
           </a:xfrm>
           <a:prstGeom prst="rect">
             <a:avLst/>
@@ -5024,110 +3768,38 @@
           <a:effectLst/>
         </p:spPr>
         <p:txBody>
-          <a:bodyPr wrap="square" lIns="27432" rIns="27432" tIns="18288" bIns="18288" anchor="ctr">
+          <a:bodyPr wrap="none" lIns="18288" rIns="18288" tIns="18288" bIns="18288" anchor="t">
             <a:spAutoFit/>
           </a:bodyPr>
           <a:lstStyle/>
           <a:p>
-            <a:pPr algn="l">
+            <a:pPr algn="r">
               <a:spcAft>
                 <a:spcPts val="0"/>
               </a:spcAft>
             </a:pPr>
             <a:r>
-              <a:rPr sz="1800" b="0" i="0">
+              <a:rPr sz="1050" b="0" i="0">
                 <a:solidFill>
-                  <a:srgbClr val="E7F0F3"/>
+                  <a:srgbClr val="B4C7D2"/>
                 </a:solidFill>
                 <a:latin typeface="Arial"/>
               </a:rPr>
-              <a:t>w(r) ↑</a:t>
-            </a:r>
-          </a:p>
-        </p:txBody>
-      </p:sp>
-      <p:cxnSp>
-        <p:nvCxnSpPr>
-          <p:cNvPr id="88" name="C4-E18 arrow 86" descr="sci-ppt:o086"/>
-          <p:cNvCxnSpPr/>
-          <p:nvPr/>
-        </p:nvCxnSpPr>
-        <p:spPr>
-          <a:xfrm flipV="1">
-            <a:off x="2286000" y="2971800"/>
-            <a:ext cx="0" cy="594360"/>
-          </a:xfrm>
-          <a:prstGeom prst="line">
-            <a:avLst/>
-          </a:prstGeom>
-          <a:ln w="25400">
-            <a:solidFill>
-              <a:srgbClr val="8EDBD4"/>
-            </a:solidFill>
-            <a:headEnd type="none" w="med" len="med"/>
-            <a:tailEnd type="triangle" w="med" len="med"/>
-          </a:ln>
-          <a:effectLst/>
-        </p:spPr>
-      </p:cxnSp>
-      <p:cxnSp>
-        <p:nvCxnSpPr>
-          <p:cNvPr id="89" name="C4-E18 arrow 87" descr="sci-ppt:o087"/>
-          <p:cNvCxnSpPr/>
-          <p:nvPr/>
-        </p:nvCxnSpPr>
-        <p:spPr>
-          <a:xfrm flipV="1">
-            <a:off x="4069080" y="2971800"/>
-            <a:ext cx="0" cy="594360"/>
-          </a:xfrm>
-          <a:prstGeom prst="line">
-            <a:avLst/>
-          </a:prstGeom>
-          <a:ln w="25400">
-            <a:solidFill>
-              <a:srgbClr val="8EDBD4"/>
-            </a:solidFill>
-            <a:headEnd type="none" w="med" len="med"/>
-            <a:tailEnd type="triangle" w="med" len="med"/>
-          </a:ln>
-          <a:effectLst/>
-        </p:spPr>
-      </p:cxnSp>
-      <p:cxnSp>
-        <p:nvCxnSpPr>
-          <p:cNvPr id="90" name="C4-E18 arrow 88" descr="sci-ppt:o088"/>
-          <p:cNvCxnSpPr/>
-          <p:nvPr/>
-        </p:nvCxnSpPr>
-        <p:spPr>
-          <a:xfrm flipV="1">
-            <a:off x="5852160" y="2971800"/>
-            <a:ext cx="0" cy="594360"/>
-          </a:xfrm>
-          <a:prstGeom prst="line">
-            <a:avLst/>
-          </a:prstGeom>
-          <a:ln w="25400">
-            <a:solidFill>
-              <a:srgbClr val="8EDBD4"/>
-            </a:solidFill>
-            <a:headEnd type="none" w="med" len="med"/>
-            <a:tailEnd type="triangle" w="med" len="med"/>
-          </a:ln>
-          <a:effectLst/>
-        </p:spPr>
-      </p:cxnSp>
-      <p:sp>
-        <p:nvSpPr>
-          <p:cNvPr id="91" name="C4-E18 text 89" descr="sci-ppt:o089"/>
+              <a:t>2</a:t>
+            </a:r>
+          </a:p>
+        </p:txBody>
+      </p:sp>
+      <p:sp>
+        <p:nvSpPr>
+          <p:cNvPr id="27" name="C4-E18 text 25" descr="sci-ppt:o025"/>
           <p:cNvSpPr txBox="1"/>
           <p:nvPr/>
         </p:nvSpPr>
         <p:spPr>
           <a:xfrm>
-            <a:off x="2834640" y="3611880"/>
-            <a:ext cx="3657600" cy="274320"/>
+            <a:off x="914400" y="5221224"/>
+            <a:ext cx="5669280" cy="231648"/>
           </a:xfrm>
           <a:prstGeom prst="rect">
             <a:avLst/>
@@ -5136,60 +3808,38 @@
           <a:effectLst/>
         </p:spPr>
         <p:txBody>
-          <a:bodyPr wrap="square" lIns="27432" rIns="27432" tIns="18288" bIns="18288" anchor="ctr">
+          <a:bodyPr wrap="none" lIns="18288" rIns="18288" tIns="18288" bIns="18288" anchor="t">
             <a:spAutoFit/>
           </a:bodyPr>
           <a:lstStyle/>
           <a:p>
-            <a:pPr algn="l">
+            <a:pPr algn="ctr">
               <a:spcAft>
                 <a:spcPts val="0"/>
               </a:spcAft>
             </a:pPr>
             <a:r>
-              <a:rPr sz="1600" b="0" i="0">
+              <a:rPr sz="1200" b="0" i="0">
                 <a:solidFill>
                   <a:srgbClr val="E7F0F3"/>
                 </a:solidFill>
                 <a:latin typeface="Arial"/>
               </a:rPr>
-              <a:t>p₀: maintained pressure</a:t>
-            </a:r>
-          </a:p>
-        </p:txBody>
-      </p:sp>
-      <p:cxnSp>
-        <p:nvCxnSpPr>
-          <p:cNvPr id="92" name="C4-E18 line 90" descr="sci-ppt:o090"/>
-          <p:cNvCxnSpPr/>
+              <a:t>r / b</a:t>
+            </a:r>
+          </a:p>
+        </p:txBody>
+      </p:sp>
+      <p:sp>
+        <p:nvSpPr>
+          <p:cNvPr id="28" name="C4-E18 text 26" descr="sci-ppt:o026"/>
+          <p:cNvSpPr txBox="1"/>
           <p:nvPr/>
-        </p:nvCxnSpPr>
+        </p:nvSpPr>
         <p:spPr>
           <a:xfrm>
-            <a:off x="4069080" y="3200400"/>
-            <a:ext cx="3063240" cy="0"/>
-          </a:xfrm>
-          <a:prstGeom prst="line">
-            <a:avLst/>
-          </a:prstGeom>
-          <a:ln w="25400">
-            <a:solidFill>
-              <a:srgbClr val="8EDBD4"/>
-            </a:solidFill>
-          </a:ln>
-          <a:effectLst/>
-        </p:spPr>
-      </p:cxnSp>
-      <p:sp>
-        <p:nvSpPr>
-          <p:cNvPr id="93" name="C4-E18 text 91" descr="sci-ppt:o091"/>
-          <p:cNvSpPr txBox="1"/>
-          <p:nvPr/>
-        </p:nvSpPr>
-        <p:spPr>
-          <a:xfrm>
-            <a:off x="5486400" y="3246120"/>
-            <a:ext cx="914400" cy="274320"/>
+            <a:off x="365760" y="1024128"/>
+            <a:ext cx="5669280" cy="231648"/>
           </a:xfrm>
           <a:prstGeom prst="rect">
             <a:avLst/>
@@ -5198,7 +3848,7 @@
           <a:effectLst/>
         </p:spPr>
         <p:txBody>
-          <a:bodyPr wrap="square" lIns="27432" rIns="27432" tIns="18288" bIns="18288" anchor="ctr">
+          <a:bodyPr wrap="none" lIns="18288" rIns="18288" tIns="18288" bIns="18288" anchor="t">
             <a:spAutoFit/>
           </a:bodyPr>
           <a:lstStyle/>
@@ -5209,35 +3859,1850 @@
               </a:spcAft>
             </a:pPr>
             <a:r>
-              <a:rPr sz="1600" b="0" i="0">
+              <a:rPr sz="1200" b="0" i="0">
                 <a:solidFill>
                   <a:srgbClr val="E7F0F3"/>
                 </a:solidFill>
                 <a:latin typeface="Arial"/>
               </a:rPr>
-              <a:t>b</a:t>
-            </a:r>
-          </a:p>
-        </p:txBody>
-      </p:sp>
-      <p:sp>
-        <p:nvSpPr>
-          <p:cNvPr id="94" name="C4-E18 ellipse 92" descr="sci-ppt:o092"/>
+              <a:t>integrand 2π w r</a:t>
+            </a:r>
+          </a:p>
+        </p:txBody>
+      </p:sp>
+      <p:sp>
+        <p:nvSpPr>
+          <p:cNvPr id="29" name="C4-E18 polygon 27" descr="sci-ppt:o027"/>
           <p:cNvSpPr/>
           <p:nvPr/>
         </p:nvSpPr>
         <p:spPr>
           <a:xfrm>
-            <a:off x="8686800" y="1097280"/>
-            <a:ext cx="1920240" cy="1920240"/>
+            <a:off x="914400" y="2022679"/>
+            <a:ext cx="5669280" cy="2915081"/>
           </a:xfrm>
-          <a:prstGeom prst="ellipse">
+          <a:custGeom>
             <a:avLst/>
-          </a:prstGeom>
-          <a:noFill/>
-          <a:ln w="19050">
+            <a:gdLst/>
+            <a:ahLst/>
+            <a:cxnLst/>
+            <a:rect l="l" t="t" r="r" b="b"/>
+            <a:pathLst>
+              <a:path w="5669280" h="2915081">
+                <a:moveTo>
+                  <a:pt x="0" y="2915081"/>
+                </a:moveTo>
+                <a:lnTo>
+                  <a:pt x="18960" y="2881018"/>
+                </a:lnTo>
+                <a:lnTo>
+                  <a:pt x="37921" y="2846960"/>
+                </a:lnTo>
+                <a:lnTo>
+                  <a:pt x="56882" y="2812911"/>
+                </a:lnTo>
+                <a:lnTo>
+                  <a:pt x="75843" y="2778876"/>
+                </a:lnTo>
+                <a:lnTo>
+                  <a:pt x="94804" y="2744859"/>
+                </a:lnTo>
+                <a:lnTo>
+                  <a:pt x="113764" y="2710865"/>
+                </a:lnTo>
+                <a:lnTo>
+                  <a:pt x="132725" y="2676899"/>
+                </a:lnTo>
+                <a:lnTo>
+                  <a:pt x="151686" y="2642964"/>
+                </a:lnTo>
+                <a:lnTo>
+                  <a:pt x="170647" y="2609066"/>
+                </a:lnTo>
+                <a:lnTo>
+                  <a:pt x="189608" y="2575209"/>
+                </a:lnTo>
+                <a:lnTo>
+                  <a:pt x="208568" y="2541398"/>
+                </a:lnTo>
+                <a:lnTo>
+                  <a:pt x="227529" y="2507637"/>
+                </a:lnTo>
+                <a:lnTo>
+                  <a:pt x="246490" y="2473930"/>
+                </a:lnTo>
+                <a:lnTo>
+                  <a:pt x="265451" y="2440283"/>
+                </a:lnTo>
+                <a:lnTo>
+                  <a:pt x="284412" y="2406700"/>
+                </a:lnTo>
+                <a:lnTo>
+                  <a:pt x="303372" y="2373184"/>
+                </a:lnTo>
+                <a:lnTo>
+                  <a:pt x="322333" y="2339742"/>
+                </a:lnTo>
+                <a:lnTo>
+                  <a:pt x="341294" y="2306377"/>
+                </a:lnTo>
+                <a:lnTo>
+                  <a:pt x="360255" y="2273094"/>
+                </a:lnTo>
+                <a:lnTo>
+                  <a:pt x="379216" y="2239897"/>
+                </a:lnTo>
+                <a:lnTo>
+                  <a:pt x="398176" y="2206791"/>
+                </a:lnTo>
+                <a:lnTo>
+                  <a:pt x="417137" y="2173780"/>
+                </a:lnTo>
+                <a:lnTo>
+                  <a:pt x="436098" y="2140869"/>
+                </a:lnTo>
+                <a:lnTo>
+                  <a:pt x="455059" y="2108062"/>
+                </a:lnTo>
+                <a:lnTo>
+                  <a:pt x="474020" y="2075363"/>
+                </a:lnTo>
+                <a:lnTo>
+                  <a:pt x="492980" y="2042777"/>
+                </a:lnTo>
+                <a:lnTo>
+                  <a:pt x="511941" y="2010309"/>
+                </a:lnTo>
+                <a:lnTo>
+                  <a:pt x="530902" y="1977963"/>
+                </a:lnTo>
+                <a:lnTo>
+                  <a:pt x="549863" y="1945742"/>
+                </a:lnTo>
+                <a:lnTo>
+                  <a:pt x="568824" y="1913653"/>
+                </a:lnTo>
+                <a:lnTo>
+                  <a:pt x="587784" y="1881698"/>
+                </a:lnTo>
+                <a:lnTo>
+                  <a:pt x="606745" y="1849882"/>
+                </a:lnTo>
+                <a:lnTo>
+                  <a:pt x="625706" y="1818210"/>
+                </a:lnTo>
+                <a:lnTo>
+                  <a:pt x="644667" y="1786685"/>
+                </a:lnTo>
+                <a:lnTo>
+                  <a:pt x="663628" y="1755313"/>
+                </a:lnTo>
+                <a:lnTo>
+                  <a:pt x="682588" y="1724097"/>
+                </a:lnTo>
+                <a:lnTo>
+                  <a:pt x="701549" y="1693042"/>
+                </a:lnTo>
+                <a:lnTo>
+                  <a:pt x="720510" y="1662151"/>
+                </a:lnTo>
+                <a:lnTo>
+                  <a:pt x="739471" y="1631430"/>
+                </a:lnTo>
+                <a:lnTo>
+                  <a:pt x="758432" y="1600882"/>
+                </a:lnTo>
+                <a:lnTo>
+                  <a:pt x="777392" y="1570511"/>
+                </a:lnTo>
+                <a:lnTo>
+                  <a:pt x="796353" y="1540322"/>
+                </a:lnTo>
+                <a:lnTo>
+                  <a:pt x="815314" y="1510319"/>
+                </a:lnTo>
+                <a:lnTo>
+                  <a:pt x="834275" y="1480505"/>
+                </a:lnTo>
+                <a:lnTo>
+                  <a:pt x="853236" y="1450886"/>
+                </a:lnTo>
+                <a:lnTo>
+                  <a:pt x="872196" y="1421464"/>
+                </a:lnTo>
+                <a:lnTo>
+                  <a:pt x="891157" y="1392244"/>
+                </a:lnTo>
+                <a:lnTo>
+                  <a:pt x="910118" y="1363231"/>
+                </a:lnTo>
+                <a:lnTo>
+                  <a:pt x="929079" y="1334427"/>
+                </a:lnTo>
+                <a:lnTo>
+                  <a:pt x="948040" y="1305838"/>
+                </a:lnTo>
+                <a:lnTo>
+                  <a:pt x="967000" y="1277466"/>
+                </a:lnTo>
+                <a:lnTo>
+                  <a:pt x="985961" y="1249316"/>
+                </a:lnTo>
+                <a:lnTo>
+                  <a:pt x="1004922" y="1221392"/>
+                </a:lnTo>
+                <a:lnTo>
+                  <a:pt x="1023883" y="1193698"/>
+                </a:lnTo>
+                <a:lnTo>
+                  <a:pt x="1042844" y="1166237"/>
+                </a:lnTo>
+                <a:lnTo>
+                  <a:pt x="1061804" y="1139013"/>
+                </a:lnTo>
+                <a:lnTo>
+                  <a:pt x="1080765" y="1112031"/>
+                </a:lnTo>
+                <a:lnTo>
+                  <a:pt x="1099726" y="1085293"/>
+                </a:lnTo>
+                <a:lnTo>
+                  <a:pt x="1118687" y="1058804"/>
+                </a:lnTo>
+                <a:lnTo>
+                  <a:pt x="1137648" y="1032567"/>
+                </a:lnTo>
+                <a:lnTo>
+                  <a:pt x="1156608" y="1006586"/>
+                </a:lnTo>
+                <a:lnTo>
+                  <a:pt x="1175569" y="980865"/>
+                </a:lnTo>
+                <a:lnTo>
+                  <a:pt x="1194530" y="955407"/>
+                </a:lnTo>
+                <a:lnTo>
+                  <a:pt x="1213491" y="930215"/>
+                </a:lnTo>
+                <a:lnTo>
+                  <a:pt x="1232452" y="905294"/>
+                </a:lnTo>
+                <a:lnTo>
+                  <a:pt x="1251412" y="880647"/>
+                </a:lnTo>
+                <a:lnTo>
+                  <a:pt x="1270373" y="856276"/>
+                </a:lnTo>
+                <a:lnTo>
+                  <a:pt x="1289334" y="832187"/>
+                </a:lnTo>
+                <a:lnTo>
+                  <a:pt x="1308295" y="808382"/>
+                </a:lnTo>
+                <a:lnTo>
+                  <a:pt x="1327256" y="784864"/>
+                </a:lnTo>
+                <a:lnTo>
+                  <a:pt x="1346216" y="761637"/>
+                </a:lnTo>
+                <a:lnTo>
+                  <a:pt x="1365177" y="738704"/>
+                </a:lnTo>
+                <a:lnTo>
+                  <a:pt x="1384138" y="716068"/>
+                </a:lnTo>
+                <a:lnTo>
+                  <a:pt x="1403099" y="693733"/>
+                </a:lnTo>
+                <a:lnTo>
+                  <a:pt x="1422060" y="671702"/>
+                </a:lnTo>
+                <a:lnTo>
+                  <a:pt x="1441021" y="649978"/>
+                </a:lnTo>
+                <a:lnTo>
+                  <a:pt x="1459981" y="628564"/>
+                </a:lnTo>
+                <a:lnTo>
+                  <a:pt x="1478942" y="607462"/>
+                </a:lnTo>
+                <a:lnTo>
+                  <a:pt x="1497903" y="586678"/>
+                </a:lnTo>
+                <a:lnTo>
+                  <a:pt x="1516864" y="566212"/>
+                </a:lnTo>
+                <a:lnTo>
+                  <a:pt x="1535825" y="546068"/>
+                </a:lnTo>
+                <a:lnTo>
+                  <a:pt x="1554785" y="526250"/>
+                </a:lnTo>
+                <a:lnTo>
+                  <a:pt x="1573746" y="506759"/>
+                </a:lnTo>
+                <a:lnTo>
+                  <a:pt x="1592707" y="487600"/>
+                </a:lnTo>
+                <a:lnTo>
+                  <a:pt x="1611668" y="468773"/>
+                </a:lnTo>
+                <a:lnTo>
+                  <a:pt x="1630629" y="450283"/>
+                </a:lnTo>
+                <a:lnTo>
+                  <a:pt x="1649589" y="432132"/>
+                </a:lnTo>
+                <a:lnTo>
+                  <a:pt x="1668550" y="414323"/>
+                </a:lnTo>
+                <a:lnTo>
+                  <a:pt x="1687511" y="396858"/>
+                </a:lnTo>
+                <a:lnTo>
+                  <a:pt x="1706472" y="379740"/>
+                </a:lnTo>
+                <a:lnTo>
+                  <a:pt x="1725433" y="362971"/>
+                </a:lnTo>
+                <a:lnTo>
+                  <a:pt x="1744393" y="346554"/>
+                </a:lnTo>
+                <a:lnTo>
+                  <a:pt x="1763354" y="330491"/>
+                </a:lnTo>
+                <a:lnTo>
+                  <a:pt x="1782315" y="314785"/>
+                </a:lnTo>
+                <a:lnTo>
+                  <a:pt x="1801276" y="299438"/>
+                </a:lnTo>
+                <a:lnTo>
+                  <a:pt x="1820237" y="284452"/>
+                </a:lnTo>
+                <a:lnTo>
+                  <a:pt x="1839197" y="269829"/>
+                </a:lnTo>
+                <a:lnTo>
+                  <a:pt x="1858158" y="255573"/>
+                </a:lnTo>
+                <a:lnTo>
+                  <a:pt x="1877119" y="241684"/>
+                </a:lnTo>
+                <a:lnTo>
+                  <a:pt x="1896080" y="228165"/>
+                </a:lnTo>
+                <a:lnTo>
+                  <a:pt x="1915041" y="215018"/>
+                </a:lnTo>
+                <a:lnTo>
+                  <a:pt x="1934001" y="202245"/>
+                </a:lnTo>
+                <a:lnTo>
+                  <a:pt x="1952962" y="189848"/>
+                </a:lnTo>
+                <a:lnTo>
+                  <a:pt x="1971923" y="177829"/>
+                </a:lnTo>
+                <a:lnTo>
+                  <a:pt x="1990884" y="166189"/>
+                </a:lnTo>
+                <a:lnTo>
+                  <a:pt x="2009845" y="154931"/>
+                </a:lnTo>
+                <a:lnTo>
+                  <a:pt x="2028805" y="144056"/>
+                </a:lnTo>
+                <a:lnTo>
+                  <a:pt x="2047766" y="133566"/>
+                </a:lnTo>
+                <a:lnTo>
+                  <a:pt x="2066727" y="123462"/>
+                </a:lnTo>
+                <a:lnTo>
+                  <a:pt x="2085688" y="113746"/>
+                </a:lnTo>
+                <a:lnTo>
+                  <a:pt x="2104649" y="104420"/>
+                </a:lnTo>
+                <a:lnTo>
+                  <a:pt x="2123609" y="95484"/>
+                </a:lnTo>
+                <a:lnTo>
+                  <a:pt x="2142570" y="86941"/>
+                </a:lnTo>
+                <a:lnTo>
+                  <a:pt x="2161531" y="78791"/>
+                </a:lnTo>
+                <a:lnTo>
+                  <a:pt x="2180492" y="71037"/>
+                </a:lnTo>
+                <a:lnTo>
+                  <a:pt x="2199453" y="63679"/>
+                </a:lnTo>
+                <a:lnTo>
+                  <a:pt x="2218413" y="56718"/>
+                </a:lnTo>
+                <a:lnTo>
+                  <a:pt x="2237374" y="50155"/>
+                </a:lnTo>
+                <a:lnTo>
+                  <a:pt x="2256335" y="43992"/>
+                </a:lnTo>
+                <a:lnTo>
+                  <a:pt x="2275296" y="38229"/>
+                </a:lnTo>
+                <a:lnTo>
+                  <a:pt x="2294257" y="32868"/>
+                </a:lnTo>
+                <a:lnTo>
+                  <a:pt x="2313217" y="27909"/>
+                </a:lnTo>
+                <a:lnTo>
+                  <a:pt x="2332178" y="23353"/>
+                </a:lnTo>
+                <a:lnTo>
+                  <a:pt x="2351139" y="19200"/>
+                </a:lnTo>
+                <a:lnTo>
+                  <a:pt x="2370100" y="15452"/>
+                </a:lnTo>
+                <a:lnTo>
+                  <a:pt x="2389061" y="12110"/>
+                </a:lnTo>
+                <a:lnTo>
+                  <a:pt x="2408021" y="9172"/>
+                </a:lnTo>
+                <a:lnTo>
+                  <a:pt x="2426982" y="6641"/>
+                </a:lnTo>
+                <a:lnTo>
+                  <a:pt x="2445943" y="4516"/>
+                </a:lnTo>
+                <a:lnTo>
+                  <a:pt x="2464904" y="2799"/>
+                </a:lnTo>
+                <a:lnTo>
+                  <a:pt x="2483865" y="1488"/>
+                </a:lnTo>
+                <a:lnTo>
+                  <a:pt x="2502825" y="584"/>
+                </a:lnTo>
+                <a:lnTo>
+                  <a:pt x="2521786" y="88"/>
+                </a:lnTo>
+                <a:lnTo>
+                  <a:pt x="2540747" y="0"/>
+                </a:lnTo>
+                <a:lnTo>
+                  <a:pt x="2559708" y="319"/>
+                </a:lnTo>
+                <a:lnTo>
+                  <a:pt x="2578669" y="1046"/>
+                </a:lnTo>
+                <a:lnTo>
+                  <a:pt x="2597629" y="2180"/>
+                </a:lnTo>
+                <a:lnTo>
+                  <a:pt x="2616590" y="3721"/>
+                </a:lnTo>
+                <a:lnTo>
+                  <a:pt x="2635551" y="5670"/>
+                </a:lnTo>
+                <a:lnTo>
+                  <a:pt x="2654512" y="8025"/>
+                </a:lnTo>
+                <a:lnTo>
+                  <a:pt x="2673473" y="10786"/>
+                </a:lnTo>
+                <a:lnTo>
+                  <a:pt x="2692433" y="13952"/>
+                </a:lnTo>
+                <a:lnTo>
+                  <a:pt x="2711394" y="17524"/>
+                </a:lnTo>
+                <a:lnTo>
+                  <a:pt x="2730355" y="21501"/>
+                </a:lnTo>
+                <a:lnTo>
+                  <a:pt x="2749316" y="25882"/>
+                </a:lnTo>
+                <a:lnTo>
+                  <a:pt x="2768277" y="30665"/>
+                </a:lnTo>
+                <a:lnTo>
+                  <a:pt x="2787237" y="35851"/>
+                </a:lnTo>
+                <a:lnTo>
+                  <a:pt x="2806198" y="41438"/>
+                </a:lnTo>
+                <a:lnTo>
+                  <a:pt x="2825159" y="47426"/>
+                </a:lnTo>
+                <a:lnTo>
+                  <a:pt x="2844120" y="53812"/>
+                </a:lnTo>
+                <a:lnTo>
+                  <a:pt x="2863081" y="60597"/>
+                </a:lnTo>
+                <a:lnTo>
+                  <a:pt x="2882042" y="67779"/>
+                </a:lnTo>
+                <a:lnTo>
+                  <a:pt x="2901002" y="75357"/>
+                </a:lnTo>
+                <a:lnTo>
+                  <a:pt x="2919963" y="83329"/>
+                </a:lnTo>
+                <a:lnTo>
+                  <a:pt x="2938924" y="91693"/>
+                </a:lnTo>
+                <a:lnTo>
+                  <a:pt x="2957885" y="100449"/>
+                </a:lnTo>
+                <a:lnTo>
+                  <a:pt x="2976846" y="109595"/>
+                </a:lnTo>
+                <a:lnTo>
+                  <a:pt x="2995806" y="119128"/>
+                </a:lnTo>
+                <a:lnTo>
+                  <a:pt x="3014767" y="129048"/>
+                </a:lnTo>
+                <a:lnTo>
+                  <a:pt x="3033728" y="139352"/>
+                </a:lnTo>
+                <a:lnTo>
+                  <a:pt x="3052689" y="150038"/>
+                </a:lnTo>
+                <a:lnTo>
+                  <a:pt x="3071650" y="161105"/>
+                </a:lnTo>
+                <a:lnTo>
+                  <a:pt x="3090610" y="172550"/>
+                </a:lnTo>
+                <a:lnTo>
+                  <a:pt x="3109571" y="184371"/>
+                </a:lnTo>
+                <a:lnTo>
+                  <a:pt x="3128532" y="196567"/>
+                </a:lnTo>
+                <a:lnTo>
+                  <a:pt x="3147493" y="209133"/>
+                </a:lnTo>
+                <a:lnTo>
+                  <a:pt x="3166454" y="222069"/>
+                </a:lnTo>
+                <a:lnTo>
+                  <a:pt x="3185414" y="235371"/>
+                </a:lnTo>
+                <a:lnTo>
+                  <a:pt x="3204375" y="249037"/>
+                </a:lnTo>
+                <a:lnTo>
+                  <a:pt x="3223336" y="263065"/>
+                </a:lnTo>
+                <a:lnTo>
+                  <a:pt x="3242297" y="277451"/>
+                </a:lnTo>
+                <a:lnTo>
+                  <a:pt x="3261258" y="292192"/>
+                </a:lnTo>
+                <a:lnTo>
+                  <a:pt x="3280218" y="307287"/>
+                </a:lnTo>
+                <a:lnTo>
+                  <a:pt x="3299179" y="322731"/>
+                </a:lnTo>
+                <a:lnTo>
+                  <a:pt x="3318140" y="338521"/>
+                </a:lnTo>
+                <a:lnTo>
+                  <a:pt x="3337101" y="354655"/>
+                </a:lnTo>
+                <a:lnTo>
+                  <a:pt x="3356062" y="371129"/>
+                </a:lnTo>
+                <a:lnTo>
+                  <a:pt x="3375022" y="387939"/>
+                </a:lnTo>
+                <a:lnTo>
+                  <a:pt x="3393983" y="405082"/>
+                </a:lnTo>
+                <a:lnTo>
+                  <a:pt x="3412944" y="422555"/>
+                </a:lnTo>
+                <a:lnTo>
+                  <a:pt x="3431905" y="440354"/>
+                </a:lnTo>
+                <a:lnTo>
+                  <a:pt x="3450866" y="458475"/>
+                </a:lnTo>
+                <a:lnTo>
+                  <a:pt x="3469826" y="476915"/>
+                </a:lnTo>
+                <a:lnTo>
+                  <a:pt x="3488787" y="495668"/>
+                </a:lnTo>
+                <a:lnTo>
+                  <a:pt x="3507748" y="514732"/>
+                </a:lnTo>
+                <a:lnTo>
+                  <a:pt x="3526709" y="534103"/>
+                </a:lnTo>
+                <a:lnTo>
+                  <a:pt x="3545670" y="553775"/>
+                </a:lnTo>
+                <a:lnTo>
+                  <a:pt x="3564630" y="573744"/>
+                </a:lnTo>
+                <a:lnTo>
+                  <a:pt x="3583591" y="594007"/>
+                </a:lnTo>
+                <a:lnTo>
+                  <a:pt x="3602552" y="614559"/>
+                </a:lnTo>
+                <a:lnTo>
+                  <a:pt x="3621513" y="635394"/>
+                </a:lnTo>
+                <a:lnTo>
+                  <a:pt x="3640474" y="656509"/>
+                </a:lnTo>
+                <a:lnTo>
+                  <a:pt x="3659434" y="677899"/>
+                </a:lnTo>
+                <a:lnTo>
+                  <a:pt x="3678395" y="699558"/>
+                </a:lnTo>
+                <a:lnTo>
+                  <a:pt x="3697356" y="721481"/>
+                </a:lnTo>
+                <a:lnTo>
+                  <a:pt x="3716317" y="743665"/>
+                </a:lnTo>
+                <a:lnTo>
+                  <a:pt x="3735278" y="766102"/>
+                </a:lnTo>
+                <a:lnTo>
+                  <a:pt x="3754238" y="788789"/>
+                </a:lnTo>
+                <a:lnTo>
+                  <a:pt x="3773199" y="811719"/>
+                </a:lnTo>
+                <a:lnTo>
+                  <a:pt x="3792160" y="834888"/>
+                </a:lnTo>
+                <a:lnTo>
+                  <a:pt x="3811121" y="858289"/>
+                </a:lnTo>
+                <a:lnTo>
+                  <a:pt x="3830082" y="881917"/>
+                </a:lnTo>
+                <a:lnTo>
+                  <a:pt x="3849042" y="905766"/>
+                </a:lnTo>
+                <a:lnTo>
+                  <a:pt x="3868003" y="929830"/>
+                </a:lnTo>
+                <a:lnTo>
+                  <a:pt x="3886964" y="954103"/>
+                </a:lnTo>
+                <a:lnTo>
+                  <a:pt x="3905925" y="978579"/>
+                </a:lnTo>
+                <a:lnTo>
+                  <a:pt x="3924886" y="1003251"/>
+                </a:lnTo>
+                <a:lnTo>
+                  <a:pt x="3943846" y="1028114"/>
+                </a:lnTo>
+                <a:lnTo>
+                  <a:pt x="3962807" y="1053161"/>
+                </a:lnTo>
+                <a:lnTo>
+                  <a:pt x="3981768" y="1078386"/>
+                </a:lnTo>
+                <a:lnTo>
+                  <a:pt x="4000729" y="1103781"/>
+                </a:lnTo>
+                <a:lnTo>
+                  <a:pt x="4019690" y="1129340"/>
+                </a:lnTo>
+                <a:lnTo>
+                  <a:pt x="4038650" y="1155057"/>
+                </a:lnTo>
+                <a:lnTo>
+                  <a:pt x="4057611" y="1180923"/>
+                </a:lnTo>
+                <a:lnTo>
+                  <a:pt x="4076572" y="1206933"/>
+                </a:lnTo>
+                <a:lnTo>
+                  <a:pt x="4095533" y="1233079"/>
+                </a:lnTo>
+                <a:lnTo>
+                  <a:pt x="4114494" y="1259353"/>
+                </a:lnTo>
+                <a:lnTo>
+                  <a:pt x="4133454" y="1285748"/>
+                </a:lnTo>
+                <a:lnTo>
+                  <a:pt x="4152415" y="1312257"/>
+                </a:lnTo>
+                <a:lnTo>
+                  <a:pt x="4171376" y="1338872"/>
+                </a:lnTo>
+                <a:lnTo>
+                  <a:pt x="4190337" y="1365585"/>
+                </a:lnTo>
+                <a:lnTo>
+                  <a:pt x="4209298" y="1392389"/>
+                </a:lnTo>
+                <a:lnTo>
+                  <a:pt x="4228258" y="1419275"/>
+                </a:lnTo>
+                <a:lnTo>
+                  <a:pt x="4247219" y="1446235"/>
+                </a:lnTo>
+                <a:lnTo>
+                  <a:pt x="4266180" y="1473262"/>
+                </a:lnTo>
+                <a:lnTo>
+                  <a:pt x="4285141" y="1500346"/>
+                </a:lnTo>
+                <a:lnTo>
+                  <a:pt x="4304102" y="1527480"/>
+                </a:lnTo>
+                <a:lnTo>
+                  <a:pt x="4323063" y="1554655"/>
+                </a:lnTo>
+                <a:lnTo>
+                  <a:pt x="4342023" y="1581862"/>
+                </a:lnTo>
+                <a:lnTo>
+                  <a:pt x="4360984" y="1609092"/>
+                </a:lnTo>
+                <a:lnTo>
+                  <a:pt x="4379945" y="1636336"/>
+                </a:lnTo>
+                <a:lnTo>
+                  <a:pt x="4398906" y="1663587"/>
+                </a:lnTo>
+                <a:lnTo>
+                  <a:pt x="4417867" y="1690833"/>
+                </a:lnTo>
+                <a:lnTo>
+                  <a:pt x="4436827" y="1718067"/>
+                </a:lnTo>
+                <a:lnTo>
+                  <a:pt x="4455788" y="1745278"/>
+                </a:lnTo>
+                <a:lnTo>
+                  <a:pt x="4474749" y="1772458"/>
+                </a:lnTo>
+                <a:lnTo>
+                  <a:pt x="4493710" y="1799596"/>
+                </a:lnTo>
+                <a:lnTo>
+                  <a:pt x="4512671" y="1826684"/>
+                </a:lnTo>
+                <a:lnTo>
+                  <a:pt x="4531631" y="1853710"/>
+                </a:lnTo>
+                <a:lnTo>
+                  <a:pt x="4550592" y="1880665"/>
+                </a:lnTo>
+                <a:lnTo>
+                  <a:pt x="4569553" y="1907540"/>
+                </a:lnTo>
+                <a:lnTo>
+                  <a:pt x="4588514" y="1934323"/>
+                </a:lnTo>
+                <a:lnTo>
+                  <a:pt x="4607475" y="1961005"/>
+                </a:lnTo>
+                <a:lnTo>
+                  <a:pt x="4626435" y="1987574"/>
+                </a:lnTo>
+                <a:lnTo>
+                  <a:pt x="4645396" y="2014021"/>
+                </a:lnTo>
+                <a:lnTo>
+                  <a:pt x="4664357" y="2040335"/>
+                </a:lnTo>
+                <a:lnTo>
+                  <a:pt x="4683318" y="2066504"/>
+                </a:lnTo>
+                <a:lnTo>
+                  <a:pt x="4702279" y="2092518"/>
+                </a:lnTo>
+                <a:lnTo>
+                  <a:pt x="4721239" y="2118366"/>
+                </a:lnTo>
+                <a:lnTo>
+                  <a:pt x="4740200" y="2144037"/>
+                </a:lnTo>
+                <a:lnTo>
+                  <a:pt x="4759161" y="2169519"/>
+                </a:lnTo>
+                <a:lnTo>
+                  <a:pt x="4778122" y="2194800"/>
+                </a:lnTo>
+                <a:lnTo>
+                  <a:pt x="4797083" y="2219870"/>
+                </a:lnTo>
+                <a:lnTo>
+                  <a:pt x="4816043" y="2244716"/>
+                </a:lnTo>
+                <a:lnTo>
+                  <a:pt x="4835004" y="2269326"/>
+                </a:lnTo>
+                <a:lnTo>
+                  <a:pt x="4853965" y="2293690"/>
+                </a:lnTo>
+                <a:lnTo>
+                  <a:pt x="4872926" y="2317793"/>
+                </a:lnTo>
+                <a:lnTo>
+                  <a:pt x="4891887" y="2341625"/>
+                </a:lnTo>
+                <a:lnTo>
+                  <a:pt x="4910847" y="2365172"/>
+                </a:lnTo>
+                <a:lnTo>
+                  <a:pt x="4929808" y="2388423"/>
+                </a:lnTo>
+                <a:lnTo>
+                  <a:pt x="4948769" y="2411364"/>
+                </a:lnTo>
+                <a:lnTo>
+                  <a:pt x="4967730" y="2433984"/>
+                </a:lnTo>
+                <a:lnTo>
+                  <a:pt x="4986691" y="2456268"/>
+                </a:lnTo>
+                <a:lnTo>
+                  <a:pt x="5005651" y="2478204"/>
+                </a:lnTo>
+                <a:lnTo>
+                  <a:pt x="5024612" y="2499779"/>
+                </a:lnTo>
+                <a:lnTo>
+                  <a:pt x="5043573" y="2520979"/>
+                </a:lnTo>
+                <a:lnTo>
+                  <a:pt x="5062534" y="2541791"/>
+                </a:lnTo>
+                <a:lnTo>
+                  <a:pt x="5081495" y="2562201"/>
+                </a:lnTo>
+                <a:lnTo>
+                  <a:pt x="5100455" y="2582196"/>
+                </a:lnTo>
+                <a:lnTo>
+                  <a:pt x="5119416" y="2601762"/>
+                </a:lnTo>
+                <a:lnTo>
+                  <a:pt x="5138377" y="2620884"/>
+                </a:lnTo>
+                <a:lnTo>
+                  <a:pt x="5157338" y="2639549"/>
+                </a:lnTo>
+                <a:lnTo>
+                  <a:pt x="5176299" y="2657743"/>
+                </a:lnTo>
+                <a:lnTo>
+                  <a:pt x="5195259" y="2675450"/>
+                </a:lnTo>
+                <a:lnTo>
+                  <a:pt x="5214220" y="2692657"/>
+                </a:lnTo>
+                <a:lnTo>
+                  <a:pt x="5233181" y="2709348"/>
+                </a:lnTo>
+                <a:lnTo>
+                  <a:pt x="5252142" y="2725509"/>
+                </a:lnTo>
+                <a:lnTo>
+                  <a:pt x="5271103" y="2741125"/>
+                </a:lnTo>
+                <a:lnTo>
+                  <a:pt x="5290063" y="2756181"/>
+                </a:lnTo>
+                <a:lnTo>
+                  <a:pt x="5309024" y="2770661"/>
+                </a:lnTo>
+                <a:lnTo>
+                  <a:pt x="5327985" y="2784551"/>
+                </a:lnTo>
+                <a:lnTo>
+                  <a:pt x="5346946" y="2797834"/>
+                </a:lnTo>
+                <a:lnTo>
+                  <a:pt x="5365907" y="2810494"/>
+                </a:lnTo>
+                <a:lnTo>
+                  <a:pt x="5384867" y="2822517"/>
+                </a:lnTo>
+                <a:lnTo>
+                  <a:pt x="5403828" y="2833886"/>
+                </a:lnTo>
+                <a:lnTo>
+                  <a:pt x="5422789" y="2844584"/>
+                </a:lnTo>
+                <a:lnTo>
+                  <a:pt x="5441750" y="2854596"/>
+                </a:lnTo>
+                <a:lnTo>
+                  <a:pt x="5460711" y="2863906"/>
+                </a:lnTo>
+                <a:lnTo>
+                  <a:pt x="5479671" y="2872496"/>
+                </a:lnTo>
+                <a:lnTo>
+                  <a:pt x="5498632" y="2880350"/>
+                </a:lnTo>
+                <a:lnTo>
+                  <a:pt x="5517593" y="2887451"/>
+                </a:lnTo>
+                <a:lnTo>
+                  <a:pt x="5536554" y="2893782"/>
+                </a:lnTo>
+                <a:lnTo>
+                  <a:pt x="5555515" y="2899326"/>
+                </a:lnTo>
+                <a:lnTo>
+                  <a:pt x="5574475" y="2904065"/>
+                </a:lnTo>
+                <a:lnTo>
+                  <a:pt x="5593436" y="2907983"/>
+                </a:lnTo>
+                <a:lnTo>
+                  <a:pt x="5612397" y="2911061"/>
+                </a:lnTo>
+                <a:lnTo>
+                  <a:pt x="5631358" y="2913282"/>
+                </a:lnTo>
+                <a:lnTo>
+                  <a:pt x="5650319" y="2914628"/>
+                </a:lnTo>
+                <a:lnTo>
+                  <a:pt x="5669280" y="2915081"/>
+                </a:lnTo>
+                <a:lnTo>
+                  <a:pt x="5669280" y="2915081"/>
+                </a:lnTo>
+                <a:lnTo>
+                  <a:pt x="5650319" y="2915081"/>
+                </a:lnTo>
+                <a:lnTo>
+                  <a:pt x="5631358" y="2915081"/>
+                </a:lnTo>
+                <a:lnTo>
+                  <a:pt x="5612397" y="2915081"/>
+                </a:lnTo>
+                <a:lnTo>
+                  <a:pt x="5593436" y="2915081"/>
+                </a:lnTo>
+                <a:lnTo>
+                  <a:pt x="5574475" y="2915081"/>
+                </a:lnTo>
+                <a:lnTo>
+                  <a:pt x="5555515" y="2915081"/>
+                </a:lnTo>
+                <a:lnTo>
+                  <a:pt x="5536554" y="2915081"/>
+                </a:lnTo>
+                <a:lnTo>
+                  <a:pt x="5517593" y="2915081"/>
+                </a:lnTo>
+                <a:lnTo>
+                  <a:pt x="5498632" y="2915081"/>
+                </a:lnTo>
+                <a:lnTo>
+                  <a:pt x="5479671" y="2915081"/>
+                </a:lnTo>
+                <a:lnTo>
+                  <a:pt x="5460711" y="2915081"/>
+                </a:lnTo>
+                <a:lnTo>
+                  <a:pt x="5441750" y="2915081"/>
+                </a:lnTo>
+                <a:lnTo>
+                  <a:pt x="5422789" y="2915081"/>
+                </a:lnTo>
+                <a:lnTo>
+                  <a:pt x="5403828" y="2915081"/>
+                </a:lnTo>
+                <a:lnTo>
+                  <a:pt x="5384867" y="2915081"/>
+                </a:lnTo>
+                <a:lnTo>
+                  <a:pt x="5365907" y="2915081"/>
+                </a:lnTo>
+                <a:lnTo>
+                  <a:pt x="5346946" y="2915081"/>
+                </a:lnTo>
+                <a:lnTo>
+                  <a:pt x="5327985" y="2915081"/>
+                </a:lnTo>
+                <a:lnTo>
+                  <a:pt x="5309024" y="2915081"/>
+                </a:lnTo>
+                <a:lnTo>
+                  <a:pt x="5290063" y="2915081"/>
+                </a:lnTo>
+                <a:lnTo>
+                  <a:pt x="5271103" y="2915081"/>
+                </a:lnTo>
+                <a:lnTo>
+                  <a:pt x="5252142" y="2915081"/>
+                </a:lnTo>
+                <a:lnTo>
+                  <a:pt x="5233181" y="2915081"/>
+                </a:lnTo>
+                <a:lnTo>
+                  <a:pt x="5214220" y="2915081"/>
+                </a:lnTo>
+                <a:lnTo>
+                  <a:pt x="5195259" y="2915081"/>
+                </a:lnTo>
+                <a:lnTo>
+                  <a:pt x="5176299" y="2915081"/>
+                </a:lnTo>
+                <a:lnTo>
+                  <a:pt x="5157338" y="2915081"/>
+                </a:lnTo>
+                <a:lnTo>
+                  <a:pt x="5138377" y="2915081"/>
+                </a:lnTo>
+                <a:lnTo>
+                  <a:pt x="5119416" y="2915081"/>
+                </a:lnTo>
+                <a:lnTo>
+                  <a:pt x="5100455" y="2915081"/>
+                </a:lnTo>
+                <a:lnTo>
+                  <a:pt x="5081495" y="2915081"/>
+                </a:lnTo>
+                <a:lnTo>
+                  <a:pt x="5062534" y="2915081"/>
+                </a:lnTo>
+                <a:lnTo>
+                  <a:pt x="5043573" y="2915081"/>
+                </a:lnTo>
+                <a:lnTo>
+                  <a:pt x="5024612" y="2915081"/>
+                </a:lnTo>
+                <a:lnTo>
+                  <a:pt x="5005651" y="2915081"/>
+                </a:lnTo>
+                <a:lnTo>
+                  <a:pt x="4986691" y="2915081"/>
+                </a:lnTo>
+                <a:lnTo>
+                  <a:pt x="4967730" y="2915081"/>
+                </a:lnTo>
+                <a:lnTo>
+                  <a:pt x="4948769" y="2915081"/>
+                </a:lnTo>
+                <a:lnTo>
+                  <a:pt x="4929808" y="2915081"/>
+                </a:lnTo>
+                <a:lnTo>
+                  <a:pt x="4910847" y="2915081"/>
+                </a:lnTo>
+                <a:lnTo>
+                  <a:pt x="4891887" y="2915081"/>
+                </a:lnTo>
+                <a:lnTo>
+                  <a:pt x="4872926" y="2915081"/>
+                </a:lnTo>
+                <a:lnTo>
+                  <a:pt x="4853965" y="2915081"/>
+                </a:lnTo>
+                <a:lnTo>
+                  <a:pt x="4835004" y="2915081"/>
+                </a:lnTo>
+                <a:lnTo>
+                  <a:pt x="4816043" y="2915081"/>
+                </a:lnTo>
+                <a:lnTo>
+                  <a:pt x="4797083" y="2915081"/>
+                </a:lnTo>
+                <a:lnTo>
+                  <a:pt x="4778122" y="2915081"/>
+                </a:lnTo>
+                <a:lnTo>
+                  <a:pt x="4759161" y="2915081"/>
+                </a:lnTo>
+                <a:lnTo>
+                  <a:pt x="4740200" y="2915081"/>
+                </a:lnTo>
+                <a:lnTo>
+                  <a:pt x="4721239" y="2915081"/>
+                </a:lnTo>
+                <a:lnTo>
+                  <a:pt x="4702279" y="2915081"/>
+                </a:lnTo>
+                <a:lnTo>
+                  <a:pt x="4683318" y="2915081"/>
+                </a:lnTo>
+                <a:lnTo>
+                  <a:pt x="4664357" y="2915081"/>
+                </a:lnTo>
+                <a:lnTo>
+                  <a:pt x="4645396" y="2915081"/>
+                </a:lnTo>
+                <a:lnTo>
+                  <a:pt x="4626435" y="2915081"/>
+                </a:lnTo>
+                <a:lnTo>
+                  <a:pt x="4607475" y="2915081"/>
+                </a:lnTo>
+                <a:lnTo>
+                  <a:pt x="4588514" y="2915081"/>
+                </a:lnTo>
+                <a:lnTo>
+                  <a:pt x="4569553" y="2915081"/>
+                </a:lnTo>
+                <a:lnTo>
+                  <a:pt x="4550592" y="2915081"/>
+                </a:lnTo>
+                <a:lnTo>
+                  <a:pt x="4531631" y="2915081"/>
+                </a:lnTo>
+                <a:lnTo>
+                  <a:pt x="4512671" y="2915081"/>
+                </a:lnTo>
+                <a:lnTo>
+                  <a:pt x="4493710" y="2915081"/>
+                </a:lnTo>
+                <a:lnTo>
+                  <a:pt x="4474749" y="2915081"/>
+                </a:lnTo>
+                <a:lnTo>
+                  <a:pt x="4455788" y="2915081"/>
+                </a:lnTo>
+                <a:lnTo>
+                  <a:pt x="4436827" y="2915081"/>
+                </a:lnTo>
+                <a:lnTo>
+                  <a:pt x="4417867" y="2915081"/>
+                </a:lnTo>
+                <a:lnTo>
+                  <a:pt x="4398906" y="2915081"/>
+                </a:lnTo>
+                <a:lnTo>
+                  <a:pt x="4379945" y="2915081"/>
+                </a:lnTo>
+                <a:lnTo>
+                  <a:pt x="4360984" y="2915081"/>
+                </a:lnTo>
+                <a:lnTo>
+                  <a:pt x="4342023" y="2915081"/>
+                </a:lnTo>
+                <a:lnTo>
+                  <a:pt x="4323063" y="2915081"/>
+                </a:lnTo>
+                <a:lnTo>
+                  <a:pt x="4304102" y="2915081"/>
+                </a:lnTo>
+                <a:lnTo>
+                  <a:pt x="4285141" y="2915081"/>
+                </a:lnTo>
+                <a:lnTo>
+                  <a:pt x="4266180" y="2915081"/>
+                </a:lnTo>
+                <a:lnTo>
+                  <a:pt x="4247219" y="2915081"/>
+                </a:lnTo>
+                <a:lnTo>
+                  <a:pt x="4228258" y="2915081"/>
+                </a:lnTo>
+                <a:lnTo>
+                  <a:pt x="4209298" y="2915081"/>
+                </a:lnTo>
+                <a:lnTo>
+                  <a:pt x="4190337" y="2915081"/>
+                </a:lnTo>
+                <a:lnTo>
+                  <a:pt x="4171376" y="2915081"/>
+                </a:lnTo>
+                <a:lnTo>
+                  <a:pt x="4152415" y="2915081"/>
+                </a:lnTo>
+                <a:lnTo>
+                  <a:pt x="4133454" y="2915081"/>
+                </a:lnTo>
+                <a:lnTo>
+                  <a:pt x="4114494" y="2915081"/>
+                </a:lnTo>
+                <a:lnTo>
+                  <a:pt x="4095533" y="2915081"/>
+                </a:lnTo>
+                <a:lnTo>
+                  <a:pt x="4076572" y="2915081"/>
+                </a:lnTo>
+                <a:lnTo>
+                  <a:pt x="4057611" y="2915081"/>
+                </a:lnTo>
+                <a:lnTo>
+                  <a:pt x="4038650" y="2915081"/>
+                </a:lnTo>
+                <a:lnTo>
+                  <a:pt x="4019690" y="2915081"/>
+                </a:lnTo>
+                <a:lnTo>
+                  <a:pt x="4000729" y="2915081"/>
+                </a:lnTo>
+                <a:lnTo>
+                  <a:pt x="3981768" y="2915081"/>
+                </a:lnTo>
+                <a:lnTo>
+                  <a:pt x="3962807" y="2915081"/>
+                </a:lnTo>
+                <a:lnTo>
+                  <a:pt x="3943846" y="2915081"/>
+                </a:lnTo>
+                <a:lnTo>
+                  <a:pt x="3924886" y="2915081"/>
+                </a:lnTo>
+                <a:lnTo>
+                  <a:pt x="3905925" y="2915081"/>
+                </a:lnTo>
+                <a:lnTo>
+                  <a:pt x="3886964" y="2915081"/>
+                </a:lnTo>
+                <a:lnTo>
+                  <a:pt x="3868003" y="2915081"/>
+                </a:lnTo>
+                <a:lnTo>
+                  <a:pt x="3849042" y="2915081"/>
+                </a:lnTo>
+                <a:lnTo>
+                  <a:pt x="3830082" y="2915081"/>
+                </a:lnTo>
+                <a:lnTo>
+                  <a:pt x="3811121" y="2915081"/>
+                </a:lnTo>
+                <a:lnTo>
+                  <a:pt x="3792160" y="2915081"/>
+                </a:lnTo>
+                <a:lnTo>
+                  <a:pt x="3773199" y="2915081"/>
+                </a:lnTo>
+                <a:lnTo>
+                  <a:pt x="3754238" y="2915081"/>
+                </a:lnTo>
+                <a:lnTo>
+                  <a:pt x="3735278" y="2915081"/>
+                </a:lnTo>
+                <a:lnTo>
+                  <a:pt x="3716317" y="2915081"/>
+                </a:lnTo>
+                <a:lnTo>
+                  <a:pt x="3697356" y="2915081"/>
+                </a:lnTo>
+                <a:lnTo>
+                  <a:pt x="3678395" y="2915081"/>
+                </a:lnTo>
+                <a:lnTo>
+                  <a:pt x="3659434" y="2915081"/>
+                </a:lnTo>
+                <a:lnTo>
+                  <a:pt x="3640474" y="2915081"/>
+                </a:lnTo>
+                <a:lnTo>
+                  <a:pt x="3621513" y="2915081"/>
+                </a:lnTo>
+                <a:lnTo>
+                  <a:pt x="3602552" y="2915081"/>
+                </a:lnTo>
+                <a:lnTo>
+                  <a:pt x="3583591" y="2915081"/>
+                </a:lnTo>
+                <a:lnTo>
+                  <a:pt x="3564630" y="2915081"/>
+                </a:lnTo>
+                <a:lnTo>
+                  <a:pt x="3545670" y="2915081"/>
+                </a:lnTo>
+                <a:lnTo>
+                  <a:pt x="3526709" y="2915081"/>
+                </a:lnTo>
+                <a:lnTo>
+                  <a:pt x="3507748" y="2915081"/>
+                </a:lnTo>
+                <a:lnTo>
+                  <a:pt x="3488787" y="2915081"/>
+                </a:lnTo>
+                <a:lnTo>
+                  <a:pt x="3469826" y="2915081"/>
+                </a:lnTo>
+                <a:lnTo>
+                  <a:pt x="3450866" y="2915081"/>
+                </a:lnTo>
+                <a:lnTo>
+                  <a:pt x="3431905" y="2915081"/>
+                </a:lnTo>
+                <a:lnTo>
+                  <a:pt x="3412944" y="2915081"/>
+                </a:lnTo>
+                <a:lnTo>
+                  <a:pt x="3393983" y="2915081"/>
+                </a:lnTo>
+                <a:lnTo>
+                  <a:pt x="3375022" y="2915081"/>
+                </a:lnTo>
+                <a:lnTo>
+                  <a:pt x="3356062" y="2915081"/>
+                </a:lnTo>
+                <a:lnTo>
+                  <a:pt x="3337101" y="2915081"/>
+                </a:lnTo>
+                <a:lnTo>
+                  <a:pt x="3318140" y="2915081"/>
+                </a:lnTo>
+                <a:lnTo>
+                  <a:pt x="3299179" y="2915081"/>
+                </a:lnTo>
+                <a:lnTo>
+                  <a:pt x="3280218" y="2915081"/>
+                </a:lnTo>
+                <a:lnTo>
+                  <a:pt x="3261258" y="2915081"/>
+                </a:lnTo>
+                <a:lnTo>
+                  <a:pt x="3242297" y="2915081"/>
+                </a:lnTo>
+                <a:lnTo>
+                  <a:pt x="3223336" y="2915081"/>
+                </a:lnTo>
+                <a:lnTo>
+                  <a:pt x="3204375" y="2915081"/>
+                </a:lnTo>
+                <a:lnTo>
+                  <a:pt x="3185414" y="2915081"/>
+                </a:lnTo>
+                <a:lnTo>
+                  <a:pt x="3166454" y="2915081"/>
+                </a:lnTo>
+                <a:lnTo>
+                  <a:pt x="3147493" y="2915081"/>
+                </a:lnTo>
+                <a:lnTo>
+                  <a:pt x="3128532" y="2915081"/>
+                </a:lnTo>
+                <a:lnTo>
+                  <a:pt x="3109571" y="2915081"/>
+                </a:lnTo>
+                <a:lnTo>
+                  <a:pt x="3090610" y="2915081"/>
+                </a:lnTo>
+                <a:lnTo>
+                  <a:pt x="3071650" y="2915081"/>
+                </a:lnTo>
+                <a:lnTo>
+                  <a:pt x="3052689" y="2915081"/>
+                </a:lnTo>
+                <a:lnTo>
+                  <a:pt x="3033728" y="2915081"/>
+                </a:lnTo>
+                <a:lnTo>
+                  <a:pt x="3014767" y="2915081"/>
+                </a:lnTo>
+                <a:lnTo>
+                  <a:pt x="2995806" y="2915081"/>
+                </a:lnTo>
+                <a:lnTo>
+                  <a:pt x="2976846" y="2915081"/>
+                </a:lnTo>
+                <a:lnTo>
+                  <a:pt x="2957885" y="2915081"/>
+                </a:lnTo>
+                <a:lnTo>
+                  <a:pt x="2938924" y="2915081"/>
+                </a:lnTo>
+                <a:lnTo>
+                  <a:pt x="2919963" y="2915081"/>
+                </a:lnTo>
+                <a:lnTo>
+                  <a:pt x="2901002" y="2915081"/>
+                </a:lnTo>
+                <a:lnTo>
+                  <a:pt x="2882042" y="2915081"/>
+                </a:lnTo>
+                <a:lnTo>
+                  <a:pt x="2863081" y="2915081"/>
+                </a:lnTo>
+                <a:lnTo>
+                  <a:pt x="2844120" y="2915081"/>
+                </a:lnTo>
+                <a:lnTo>
+                  <a:pt x="2825159" y="2915081"/>
+                </a:lnTo>
+                <a:lnTo>
+                  <a:pt x="2806198" y="2915081"/>
+                </a:lnTo>
+                <a:lnTo>
+                  <a:pt x="2787237" y="2915081"/>
+                </a:lnTo>
+                <a:lnTo>
+                  <a:pt x="2768277" y="2915081"/>
+                </a:lnTo>
+                <a:lnTo>
+                  <a:pt x="2749316" y="2915081"/>
+                </a:lnTo>
+                <a:lnTo>
+                  <a:pt x="2730355" y="2915081"/>
+                </a:lnTo>
+                <a:lnTo>
+                  <a:pt x="2711394" y="2915081"/>
+                </a:lnTo>
+                <a:lnTo>
+                  <a:pt x="2692433" y="2915081"/>
+                </a:lnTo>
+                <a:lnTo>
+                  <a:pt x="2673473" y="2915081"/>
+                </a:lnTo>
+                <a:lnTo>
+                  <a:pt x="2654512" y="2915081"/>
+                </a:lnTo>
+                <a:lnTo>
+                  <a:pt x="2635551" y="2915081"/>
+                </a:lnTo>
+                <a:lnTo>
+                  <a:pt x="2616590" y="2915081"/>
+                </a:lnTo>
+                <a:lnTo>
+                  <a:pt x="2597629" y="2915081"/>
+                </a:lnTo>
+                <a:lnTo>
+                  <a:pt x="2578669" y="2915081"/>
+                </a:lnTo>
+                <a:lnTo>
+                  <a:pt x="2559708" y="2915081"/>
+                </a:lnTo>
+                <a:lnTo>
+                  <a:pt x="2540747" y="2915081"/>
+                </a:lnTo>
+                <a:lnTo>
+                  <a:pt x="2521786" y="2915081"/>
+                </a:lnTo>
+                <a:lnTo>
+                  <a:pt x="2502825" y="2915081"/>
+                </a:lnTo>
+                <a:lnTo>
+                  <a:pt x="2483865" y="2915081"/>
+                </a:lnTo>
+                <a:lnTo>
+                  <a:pt x="2464904" y="2915081"/>
+                </a:lnTo>
+                <a:lnTo>
+                  <a:pt x="2445943" y="2915081"/>
+                </a:lnTo>
+                <a:lnTo>
+                  <a:pt x="2426982" y="2915081"/>
+                </a:lnTo>
+                <a:lnTo>
+                  <a:pt x="2408021" y="2915081"/>
+                </a:lnTo>
+                <a:lnTo>
+                  <a:pt x="2389061" y="2915081"/>
+                </a:lnTo>
+                <a:lnTo>
+                  <a:pt x="2370100" y="2915081"/>
+                </a:lnTo>
+                <a:lnTo>
+                  <a:pt x="2351139" y="2915081"/>
+                </a:lnTo>
+                <a:lnTo>
+                  <a:pt x="2332178" y="2915081"/>
+                </a:lnTo>
+                <a:lnTo>
+                  <a:pt x="2313217" y="2915081"/>
+                </a:lnTo>
+                <a:lnTo>
+                  <a:pt x="2294257" y="2915081"/>
+                </a:lnTo>
+                <a:lnTo>
+                  <a:pt x="2275296" y="2915081"/>
+                </a:lnTo>
+                <a:lnTo>
+                  <a:pt x="2256335" y="2915081"/>
+                </a:lnTo>
+                <a:lnTo>
+                  <a:pt x="2237374" y="2915081"/>
+                </a:lnTo>
+                <a:lnTo>
+                  <a:pt x="2218413" y="2915081"/>
+                </a:lnTo>
+                <a:lnTo>
+                  <a:pt x="2199453" y="2915081"/>
+                </a:lnTo>
+                <a:lnTo>
+                  <a:pt x="2180492" y="2915081"/>
+                </a:lnTo>
+                <a:lnTo>
+                  <a:pt x="2161531" y="2915081"/>
+                </a:lnTo>
+                <a:lnTo>
+                  <a:pt x="2142570" y="2915081"/>
+                </a:lnTo>
+                <a:lnTo>
+                  <a:pt x="2123609" y="2915081"/>
+                </a:lnTo>
+                <a:lnTo>
+                  <a:pt x="2104649" y="2915081"/>
+                </a:lnTo>
+                <a:lnTo>
+                  <a:pt x="2085688" y="2915081"/>
+                </a:lnTo>
+                <a:lnTo>
+                  <a:pt x="2066727" y="2915081"/>
+                </a:lnTo>
+                <a:lnTo>
+                  <a:pt x="2047766" y="2915081"/>
+                </a:lnTo>
+                <a:lnTo>
+                  <a:pt x="2028805" y="2915081"/>
+                </a:lnTo>
+                <a:lnTo>
+                  <a:pt x="2009845" y="2915081"/>
+                </a:lnTo>
+                <a:lnTo>
+                  <a:pt x="1990884" y="2915081"/>
+                </a:lnTo>
+                <a:lnTo>
+                  <a:pt x="1971923" y="2915081"/>
+                </a:lnTo>
+                <a:lnTo>
+                  <a:pt x="1952962" y="2915081"/>
+                </a:lnTo>
+                <a:lnTo>
+                  <a:pt x="1934001" y="2915081"/>
+                </a:lnTo>
+                <a:lnTo>
+                  <a:pt x="1915041" y="2915081"/>
+                </a:lnTo>
+                <a:lnTo>
+                  <a:pt x="1896080" y="2915081"/>
+                </a:lnTo>
+                <a:lnTo>
+                  <a:pt x="1877119" y="2915081"/>
+                </a:lnTo>
+                <a:lnTo>
+                  <a:pt x="1858158" y="2915081"/>
+                </a:lnTo>
+                <a:lnTo>
+                  <a:pt x="1839197" y="2915081"/>
+                </a:lnTo>
+                <a:lnTo>
+                  <a:pt x="1820237" y="2915081"/>
+                </a:lnTo>
+                <a:lnTo>
+                  <a:pt x="1801276" y="2915081"/>
+                </a:lnTo>
+                <a:lnTo>
+                  <a:pt x="1782315" y="2915081"/>
+                </a:lnTo>
+                <a:lnTo>
+                  <a:pt x="1763354" y="2915081"/>
+                </a:lnTo>
+                <a:lnTo>
+                  <a:pt x="1744393" y="2915081"/>
+                </a:lnTo>
+                <a:lnTo>
+                  <a:pt x="1725433" y="2915081"/>
+                </a:lnTo>
+                <a:lnTo>
+                  <a:pt x="1706472" y="2915081"/>
+                </a:lnTo>
+                <a:lnTo>
+                  <a:pt x="1687511" y="2915081"/>
+                </a:lnTo>
+                <a:lnTo>
+                  <a:pt x="1668550" y="2915081"/>
+                </a:lnTo>
+                <a:lnTo>
+                  <a:pt x="1649589" y="2915081"/>
+                </a:lnTo>
+                <a:lnTo>
+                  <a:pt x="1630629" y="2915081"/>
+                </a:lnTo>
+                <a:lnTo>
+                  <a:pt x="1611668" y="2915081"/>
+                </a:lnTo>
+                <a:lnTo>
+                  <a:pt x="1592707" y="2915081"/>
+                </a:lnTo>
+                <a:lnTo>
+                  <a:pt x="1573746" y="2915081"/>
+                </a:lnTo>
+                <a:lnTo>
+                  <a:pt x="1554785" y="2915081"/>
+                </a:lnTo>
+                <a:lnTo>
+                  <a:pt x="1535825" y="2915081"/>
+                </a:lnTo>
+                <a:lnTo>
+                  <a:pt x="1516864" y="2915081"/>
+                </a:lnTo>
+                <a:lnTo>
+                  <a:pt x="1497903" y="2915081"/>
+                </a:lnTo>
+                <a:lnTo>
+                  <a:pt x="1478942" y="2915081"/>
+                </a:lnTo>
+                <a:lnTo>
+                  <a:pt x="1459981" y="2915081"/>
+                </a:lnTo>
+                <a:lnTo>
+                  <a:pt x="1441021" y="2915081"/>
+                </a:lnTo>
+                <a:lnTo>
+                  <a:pt x="1422060" y="2915081"/>
+                </a:lnTo>
+                <a:lnTo>
+                  <a:pt x="1403099" y="2915081"/>
+                </a:lnTo>
+                <a:lnTo>
+                  <a:pt x="1384138" y="2915081"/>
+                </a:lnTo>
+                <a:lnTo>
+                  <a:pt x="1365177" y="2915081"/>
+                </a:lnTo>
+                <a:lnTo>
+                  <a:pt x="1346216" y="2915081"/>
+                </a:lnTo>
+                <a:lnTo>
+                  <a:pt x="1327256" y="2915081"/>
+                </a:lnTo>
+                <a:lnTo>
+                  <a:pt x="1308295" y="2915081"/>
+                </a:lnTo>
+                <a:lnTo>
+                  <a:pt x="1289334" y="2915081"/>
+                </a:lnTo>
+                <a:lnTo>
+                  <a:pt x="1270373" y="2915081"/>
+                </a:lnTo>
+                <a:lnTo>
+                  <a:pt x="1251412" y="2915081"/>
+                </a:lnTo>
+                <a:lnTo>
+                  <a:pt x="1232452" y="2915081"/>
+                </a:lnTo>
+                <a:lnTo>
+                  <a:pt x="1213491" y="2915081"/>
+                </a:lnTo>
+                <a:lnTo>
+                  <a:pt x="1194530" y="2915081"/>
+                </a:lnTo>
+                <a:lnTo>
+                  <a:pt x="1175569" y="2915081"/>
+                </a:lnTo>
+                <a:lnTo>
+                  <a:pt x="1156608" y="2915081"/>
+                </a:lnTo>
+                <a:lnTo>
+                  <a:pt x="1137648" y="2915081"/>
+                </a:lnTo>
+                <a:lnTo>
+                  <a:pt x="1118687" y="2915081"/>
+                </a:lnTo>
+                <a:lnTo>
+                  <a:pt x="1099726" y="2915081"/>
+                </a:lnTo>
+                <a:lnTo>
+                  <a:pt x="1080765" y="2915081"/>
+                </a:lnTo>
+                <a:lnTo>
+                  <a:pt x="1061804" y="2915081"/>
+                </a:lnTo>
+                <a:lnTo>
+                  <a:pt x="1042844" y="2915081"/>
+                </a:lnTo>
+                <a:lnTo>
+                  <a:pt x="1023883" y="2915081"/>
+                </a:lnTo>
+                <a:lnTo>
+                  <a:pt x="1004922" y="2915081"/>
+                </a:lnTo>
+                <a:lnTo>
+                  <a:pt x="985961" y="2915081"/>
+                </a:lnTo>
+                <a:lnTo>
+                  <a:pt x="967000" y="2915081"/>
+                </a:lnTo>
+                <a:lnTo>
+                  <a:pt x="948040" y="2915081"/>
+                </a:lnTo>
+                <a:lnTo>
+                  <a:pt x="929079" y="2915081"/>
+                </a:lnTo>
+                <a:lnTo>
+                  <a:pt x="910118" y="2915081"/>
+                </a:lnTo>
+                <a:lnTo>
+                  <a:pt x="891157" y="2915081"/>
+                </a:lnTo>
+                <a:lnTo>
+                  <a:pt x="872196" y="2915081"/>
+                </a:lnTo>
+                <a:lnTo>
+                  <a:pt x="853236" y="2915081"/>
+                </a:lnTo>
+                <a:lnTo>
+                  <a:pt x="834275" y="2915081"/>
+                </a:lnTo>
+                <a:lnTo>
+                  <a:pt x="815314" y="2915081"/>
+                </a:lnTo>
+                <a:lnTo>
+                  <a:pt x="796353" y="2915081"/>
+                </a:lnTo>
+                <a:lnTo>
+                  <a:pt x="777392" y="2915081"/>
+                </a:lnTo>
+                <a:lnTo>
+                  <a:pt x="758432" y="2915081"/>
+                </a:lnTo>
+                <a:lnTo>
+                  <a:pt x="739471" y="2915081"/>
+                </a:lnTo>
+                <a:lnTo>
+                  <a:pt x="720510" y="2915081"/>
+                </a:lnTo>
+                <a:lnTo>
+                  <a:pt x="701549" y="2915081"/>
+                </a:lnTo>
+                <a:lnTo>
+                  <a:pt x="682588" y="2915081"/>
+                </a:lnTo>
+                <a:lnTo>
+                  <a:pt x="663628" y="2915081"/>
+                </a:lnTo>
+                <a:lnTo>
+                  <a:pt x="644667" y="2915081"/>
+                </a:lnTo>
+                <a:lnTo>
+                  <a:pt x="625706" y="2915081"/>
+                </a:lnTo>
+                <a:lnTo>
+                  <a:pt x="606745" y="2915081"/>
+                </a:lnTo>
+                <a:lnTo>
+                  <a:pt x="587784" y="2915081"/>
+                </a:lnTo>
+                <a:lnTo>
+                  <a:pt x="568824" y="2915081"/>
+                </a:lnTo>
+                <a:lnTo>
+                  <a:pt x="549863" y="2915081"/>
+                </a:lnTo>
+                <a:lnTo>
+                  <a:pt x="530902" y="2915081"/>
+                </a:lnTo>
+                <a:lnTo>
+                  <a:pt x="511941" y="2915081"/>
+                </a:lnTo>
+                <a:lnTo>
+                  <a:pt x="492980" y="2915081"/>
+                </a:lnTo>
+                <a:lnTo>
+                  <a:pt x="474020" y="2915081"/>
+                </a:lnTo>
+                <a:lnTo>
+                  <a:pt x="455059" y="2915081"/>
+                </a:lnTo>
+                <a:lnTo>
+                  <a:pt x="436098" y="2915081"/>
+                </a:lnTo>
+                <a:lnTo>
+                  <a:pt x="417137" y="2915081"/>
+                </a:lnTo>
+                <a:lnTo>
+                  <a:pt x="398176" y="2915081"/>
+                </a:lnTo>
+                <a:lnTo>
+                  <a:pt x="379216" y="2915081"/>
+                </a:lnTo>
+                <a:lnTo>
+                  <a:pt x="360255" y="2915081"/>
+                </a:lnTo>
+                <a:lnTo>
+                  <a:pt x="341294" y="2915081"/>
+                </a:lnTo>
+                <a:lnTo>
+                  <a:pt x="322333" y="2915081"/>
+                </a:lnTo>
+                <a:lnTo>
+                  <a:pt x="303372" y="2915081"/>
+                </a:lnTo>
+                <a:lnTo>
+                  <a:pt x="284412" y="2915081"/>
+                </a:lnTo>
+                <a:lnTo>
+                  <a:pt x="265451" y="2915081"/>
+                </a:lnTo>
+                <a:lnTo>
+                  <a:pt x="246490" y="2915081"/>
+                </a:lnTo>
+                <a:lnTo>
+                  <a:pt x="227529" y="2915081"/>
+                </a:lnTo>
+                <a:lnTo>
+                  <a:pt x="208568" y="2915081"/>
+                </a:lnTo>
+                <a:lnTo>
+                  <a:pt x="189608" y="2915081"/>
+                </a:lnTo>
+                <a:lnTo>
+                  <a:pt x="170647" y="2915081"/>
+                </a:lnTo>
+                <a:lnTo>
+                  <a:pt x="151686" y="2915081"/>
+                </a:lnTo>
+                <a:lnTo>
+                  <a:pt x="132725" y="2915081"/>
+                </a:lnTo>
+                <a:lnTo>
+                  <a:pt x="113764" y="2915081"/>
+                </a:lnTo>
+                <a:lnTo>
+                  <a:pt x="94804" y="2915081"/>
+                </a:lnTo>
+                <a:lnTo>
+                  <a:pt x="75843" y="2915081"/>
+                </a:lnTo>
+                <a:lnTo>
+                  <a:pt x="56882" y="2915081"/>
+                </a:lnTo>
+                <a:lnTo>
+                  <a:pt x="37921" y="2915081"/>
+                </a:lnTo>
+                <a:lnTo>
+                  <a:pt x="18960" y="2915081"/>
+                </a:lnTo>
+                <a:lnTo>
+                  <a:pt x="0" y="2915081"/>
+                </a:lnTo>
+                <a:close/>
+              </a:path>
+            </a:pathLst>
+          </a:custGeom>
+          <a:solidFill>
+            <a:srgbClr val="8EDBD4">
+              <a:alpha val="30000"/>
+            </a:srgbClr>
+          </a:solidFill>
+          <a:ln w="10160">
             <a:solidFill>
-              <a:srgbClr val="B4C7D2"/>
+              <a:srgbClr val="8EDBD4">
+                <a:alpha val="30000"/>
+              </a:srgbClr>
             </a:solidFill>
           </a:ln>
           <a:effectLst/>
@@ -5250,40 +5715,507 @@
           </a:p>
         </p:txBody>
       </p:sp>
-      <p:cxnSp>
-        <p:nvCxnSpPr>
-          <p:cNvPr id="95" name="C4-E18 arrow 93" descr="sci-ppt:o093"/>
-          <p:cNvCxnSpPr/>
+      <p:sp>
+        <p:nvSpPr>
+          <p:cNvPr id="30" name="C4-E18 polygon 28" descr="sci-ppt:o028"/>
+          <p:cNvSpPr/>
           <p:nvPr/>
-        </p:nvCxnSpPr>
+        </p:nvSpPr>
         <p:spPr>
           <a:xfrm>
-            <a:off x="9646920" y="2057400"/>
-            <a:ext cx="960120" cy="0"/>
+            <a:off x="914400" y="2022679"/>
+            <a:ext cx="5669280" cy="2915081"/>
           </a:xfrm>
-          <a:prstGeom prst="line">
+          <a:custGeom>
             <a:avLst/>
-          </a:prstGeom>
-          <a:ln w="25400">
+            <a:gdLst/>
+            <a:ahLst/>
+            <a:cxnLst/>
+            <a:rect l="l" t="t" r="r" b="b"/>
+            <a:pathLst>
+              <a:path w="5669280" h="2915081">
+                <a:moveTo>
+                  <a:pt x="0" y="2915081"/>
+                </a:moveTo>
+                <a:lnTo>
+                  <a:pt x="37921" y="2846960"/>
+                </a:lnTo>
+                <a:lnTo>
+                  <a:pt x="75843" y="2778876"/>
+                </a:lnTo>
+                <a:lnTo>
+                  <a:pt x="113764" y="2710865"/>
+                </a:lnTo>
+                <a:lnTo>
+                  <a:pt x="151686" y="2642964"/>
+                </a:lnTo>
+                <a:lnTo>
+                  <a:pt x="189608" y="2575209"/>
+                </a:lnTo>
+                <a:lnTo>
+                  <a:pt x="227529" y="2507637"/>
+                </a:lnTo>
+                <a:lnTo>
+                  <a:pt x="265451" y="2440283"/>
+                </a:lnTo>
+                <a:lnTo>
+                  <a:pt x="303372" y="2373184"/>
+                </a:lnTo>
+                <a:lnTo>
+                  <a:pt x="341294" y="2306377"/>
+                </a:lnTo>
+                <a:lnTo>
+                  <a:pt x="379216" y="2239897"/>
+                </a:lnTo>
+                <a:lnTo>
+                  <a:pt x="417137" y="2173780"/>
+                </a:lnTo>
+                <a:lnTo>
+                  <a:pt x="455059" y="2108062"/>
+                </a:lnTo>
+                <a:lnTo>
+                  <a:pt x="492980" y="2042777"/>
+                </a:lnTo>
+                <a:lnTo>
+                  <a:pt x="530902" y="1977963"/>
+                </a:lnTo>
+                <a:lnTo>
+                  <a:pt x="568824" y="1913653"/>
+                </a:lnTo>
+                <a:lnTo>
+                  <a:pt x="606745" y="1849882"/>
+                </a:lnTo>
+                <a:lnTo>
+                  <a:pt x="644667" y="1786685"/>
+                </a:lnTo>
+                <a:lnTo>
+                  <a:pt x="682588" y="1724097"/>
+                </a:lnTo>
+                <a:lnTo>
+                  <a:pt x="720510" y="1662151"/>
+                </a:lnTo>
+                <a:lnTo>
+                  <a:pt x="758432" y="1600882"/>
+                </a:lnTo>
+                <a:lnTo>
+                  <a:pt x="796353" y="1540322"/>
+                </a:lnTo>
+                <a:lnTo>
+                  <a:pt x="834275" y="1480505"/>
+                </a:lnTo>
+                <a:lnTo>
+                  <a:pt x="872196" y="1421464"/>
+                </a:lnTo>
+                <a:lnTo>
+                  <a:pt x="910118" y="1363231"/>
+                </a:lnTo>
+                <a:lnTo>
+                  <a:pt x="948040" y="1305838"/>
+                </a:lnTo>
+                <a:lnTo>
+                  <a:pt x="985961" y="1249316"/>
+                </a:lnTo>
+                <a:lnTo>
+                  <a:pt x="1023883" y="1193698"/>
+                </a:lnTo>
+                <a:lnTo>
+                  <a:pt x="1061804" y="1139013"/>
+                </a:lnTo>
+                <a:lnTo>
+                  <a:pt x="1099726" y="1085293"/>
+                </a:lnTo>
+                <a:lnTo>
+                  <a:pt x="1137648" y="1032567"/>
+                </a:lnTo>
+                <a:lnTo>
+                  <a:pt x="1175569" y="980865"/>
+                </a:lnTo>
+                <a:lnTo>
+                  <a:pt x="1213491" y="930215"/>
+                </a:lnTo>
+                <a:lnTo>
+                  <a:pt x="1251412" y="880647"/>
+                </a:lnTo>
+                <a:lnTo>
+                  <a:pt x="1289334" y="832187"/>
+                </a:lnTo>
+                <a:lnTo>
+                  <a:pt x="1327256" y="784864"/>
+                </a:lnTo>
+                <a:lnTo>
+                  <a:pt x="1365177" y="738704"/>
+                </a:lnTo>
+                <a:lnTo>
+                  <a:pt x="1403099" y="693733"/>
+                </a:lnTo>
+                <a:lnTo>
+                  <a:pt x="1441021" y="649978"/>
+                </a:lnTo>
+                <a:lnTo>
+                  <a:pt x="1478942" y="607462"/>
+                </a:lnTo>
+                <a:lnTo>
+                  <a:pt x="1516864" y="566212"/>
+                </a:lnTo>
+                <a:lnTo>
+                  <a:pt x="1554785" y="526250"/>
+                </a:lnTo>
+                <a:lnTo>
+                  <a:pt x="1592707" y="487600"/>
+                </a:lnTo>
+                <a:lnTo>
+                  <a:pt x="1630629" y="450283"/>
+                </a:lnTo>
+                <a:lnTo>
+                  <a:pt x="1668550" y="414323"/>
+                </a:lnTo>
+                <a:lnTo>
+                  <a:pt x="1706472" y="379740"/>
+                </a:lnTo>
+                <a:lnTo>
+                  <a:pt x="1744393" y="346554"/>
+                </a:lnTo>
+                <a:lnTo>
+                  <a:pt x="1782315" y="314785"/>
+                </a:lnTo>
+                <a:lnTo>
+                  <a:pt x="1820237" y="284452"/>
+                </a:lnTo>
+                <a:lnTo>
+                  <a:pt x="1858158" y="255573"/>
+                </a:lnTo>
+                <a:lnTo>
+                  <a:pt x="1896080" y="228165"/>
+                </a:lnTo>
+                <a:lnTo>
+                  <a:pt x="1934001" y="202245"/>
+                </a:lnTo>
+                <a:lnTo>
+                  <a:pt x="1971923" y="177829"/>
+                </a:lnTo>
+                <a:lnTo>
+                  <a:pt x="2009845" y="154931"/>
+                </a:lnTo>
+                <a:lnTo>
+                  <a:pt x="2047766" y="133566"/>
+                </a:lnTo>
+                <a:lnTo>
+                  <a:pt x="2085688" y="113746"/>
+                </a:lnTo>
+                <a:lnTo>
+                  <a:pt x="2123609" y="95484"/>
+                </a:lnTo>
+                <a:lnTo>
+                  <a:pt x="2161531" y="78791"/>
+                </a:lnTo>
+                <a:lnTo>
+                  <a:pt x="2199453" y="63679"/>
+                </a:lnTo>
+                <a:lnTo>
+                  <a:pt x="2237374" y="50155"/>
+                </a:lnTo>
+                <a:lnTo>
+                  <a:pt x="2275296" y="38229"/>
+                </a:lnTo>
+                <a:lnTo>
+                  <a:pt x="2313217" y="27909"/>
+                </a:lnTo>
+                <a:lnTo>
+                  <a:pt x="2351139" y="19200"/>
+                </a:lnTo>
+                <a:lnTo>
+                  <a:pt x="2389061" y="12110"/>
+                </a:lnTo>
+                <a:lnTo>
+                  <a:pt x="2426982" y="6641"/>
+                </a:lnTo>
+                <a:lnTo>
+                  <a:pt x="2464904" y="2799"/>
+                </a:lnTo>
+                <a:lnTo>
+                  <a:pt x="2502825" y="584"/>
+                </a:lnTo>
+                <a:lnTo>
+                  <a:pt x="2540747" y="0"/>
+                </a:lnTo>
+                <a:lnTo>
+                  <a:pt x="2578669" y="1046"/>
+                </a:lnTo>
+                <a:lnTo>
+                  <a:pt x="2616590" y="3721"/>
+                </a:lnTo>
+                <a:lnTo>
+                  <a:pt x="2654512" y="8025"/>
+                </a:lnTo>
+                <a:lnTo>
+                  <a:pt x="2692433" y="13952"/>
+                </a:lnTo>
+                <a:lnTo>
+                  <a:pt x="2730355" y="21501"/>
+                </a:lnTo>
+                <a:lnTo>
+                  <a:pt x="2768277" y="30665"/>
+                </a:lnTo>
+                <a:lnTo>
+                  <a:pt x="2806198" y="41438"/>
+                </a:lnTo>
+                <a:lnTo>
+                  <a:pt x="2844120" y="53812"/>
+                </a:lnTo>
+                <a:lnTo>
+                  <a:pt x="2882042" y="67779"/>
+                </a:lnTo>
+                <a:lnTo>
+                  <a:pt x="2919963" y="83329"/>
+                </a:lnTo>
+                <a:lnTo>
+                  <a:pt x="2957885" y="100449"/>
+                </a:lnTo>
+                <a:lnTo>
+                  <a:pt x="2995806" y="119128"/>
+                </a:lnTo>
+                <a:lnTo>
+                  <a:pt x="3033728" y="139352"/>
+                </a:lnTo>
+                <a:lnTo>
+                  <a:pt x="3071650" y="161105"/>
+                </a:lnTo>
+                <a:lnTo>
+                  <a:pt x="3109571" y="184371"/>
+                </a:lnTo>
+                <a:lnTo>
+                  <a:pt x="3147493" y="209133"/>
+                </a:lnTo>
+                <a:lnTo>
+                  <a:pt x="3185414" y="235371"/>
+                </a:lnTo>
+                <a:lnTo>
+                  <a:pt x="3223336" y="263065"/>
+                </a:lnTo>
+                <a:lnTo>
+                  <a:pt x="3261258" y="292192"/>
+                </a:lnTo>
+                <a:lnTo>
+                  <a:pt x="3299179" y="322731"/>
+                </a:lnTo>
+                <a:lnTo>
+                  <a:pt x="3337101" y="354655"/>
+                </a:lnTo>
+                <a:lnTo>
+                  <a:pt x="3375022" y="387939"/>
+                </a:lnTo>
+                <a:lnTo>
+                  <a:pt x="3412944" y="422555"/>
+                </a:lnTo>
+                <a:lnTo>
+                  <a:pt x="3450866" y="458475"/>
+                </a:lnTo>
+                <a:lnTo>
+                  <a:pt x="3488787" y="495668"/>
+                </a:lnTo>
+                <a:lnTo>
+                  <a:pt x="3526709" y="534103"/>
+                </a:lnTo>
+                <a:lnTo>
+                  <a:pt x="3564630" y="573744"/>
+                </a:lnTo>
+                <a:lnTo>
+                  <a:pt x="3602552" y="614559"/>
+                </a:lnTo>
+                <a:lnTo>
+                  <a:pt x="3640474" y="656509"/>
+                </a:lnTo>
+                <a:lnTo>
+                  <a:pt x="3678395" y="699558"/>
+                </a:lnTo>
+                <a:lnTo>
+                  <a:pt x="3716317" y="743665"/>
+                </a:lnTo>
+                <a:lnTo>
+                  <a:pt x="3754238" y="788789"/>
+                </a:lnTo>
+                <a:lnTo>
+                  <a:pt x="3792160" y="834888"/>
+                </a:lnTo>
+                <a:lnTo>
+                  <a:pt x="3830082" y="881917"/>
+                </a:lnTo>
+                <a:lnTo>
+                  <a:pt x="3868003" y="929830"/>
+                </a:lnTo>
+                <a:lnTo>
+                  <a:pt x="3905925" y="978579"/>
+                </a:lnTo>
+                <a:lnTo>
+                  <a:pt x="3943846" y="1028114"/>
+                </a:lnTo>
+                <a:lnTo>
+                  <a:pt x="3981768" y="1078386"/>
+                </a:lnTo>
+                <a:lnTo>
+                  <a:pt x="4019690" y="1129340"/>
+                </a:lnTo>
+                <a:lnTo>
+                  <a:pt x="4057611" y="1180923"/>
+                </a:lnTo>
+                <a:lnTo>
+                  <a:pt x="4095533" y="1233079"/>
+                </a:lnTo>
+                <a:lnTo>
+                  <a:pt x="4133454" y="1285748"/>
+                </a:lnTo>
+                <a:lnTo>
+                  <a:pt x="4171376" y="1338872"/>
+                </a:lnTo>
+                <a:lnTo>
+                  <a:pt x="4209298" y="1392389"/>
+                </a:lnTo>
+                <a:lnTo>
+                  <a:pt x="4247219" y="1446235"/>
+                </a:lnTo>
+                <a:lnTo>
+                  <a:pt x="4285141" y="1500346"/>
+                </a:lnTo>
+                <a:lnTo>
+                  <a:pt x="4323063" y="1554655"/>
+                </a:lnTo>
+                <a:lnTo>
+                  <a:pt x="4360984" y="1609092"/>
+                </a:lnTo>
+                <a:lnTo>
+                  <a:pt x="4398906" y="1663587"/>
+                </a:lnTo>
+                <a:lnTo>
+                  <a:pt x="4436827" y="1718067"/>
+                </a:lnTo>
+                <a:lnTo>
+                  <a:pt x="4474749" y="1772458"/>
+                </a:lnTo>
+                <a:lnTo>
+                  <a:pt x="4512671" y="1826684"/>
+                </a:lnTo>
+                <a:lnTo>
+                  <a:pt x="4550592" y="1880665"/>
+                </a:lnTo>
+                <a:lnTo>
+                  <a:pt x="4588514" y="1934323"/>
+                </a:lnTo>
+                <a:lnTo>
+                  <a:pt x="4626435" y="1987574"/>
+                </a:lnTo>
+                <a:lnTo>
+                  <a:pt x="4664357" y="2040335"/>
+                </a:lnTo>
+                <a:lnTo>
+                  <a:pt x="4702279" y="2092518"/>
+                </a:lnTo>
+                <a:lnTo>
+                  <a:pt x="4740200" y="2144037"/>
+                </a:lnTo>
+                <a:lnTo>
+                  <a:pt x="4778122" y="2194800"/>
+                </a:lnTo>
+                <a:lnTo>
+                  <a:pt x="4816043" y="2244716"/>
+                </a:lnTo>
+                <a:lnTo>
+                  <a:pt x="4853965" y="2293690"/>
+                </a:lnTo>
+                <a:lnTo>
+                  <a:pt x="4891887" y="2341625"/>
+                </a:lnTo>
+                <a:lnTo>
+                  <a:pt x="4929808" y="2388423"/>
+                </a:lnTo>
+                <a:lnTo>
+                  <a:pt x="4967730" y="2433984"/>
+                </a:lnTo>
+                <a:lnTo>
+                  <a:pt x="5005651" y="2478204"/>
+                </a:lnTo>
+                <a:lnTo>
+                  <a:pt x="5043573" y="2520979"/>
+                </a:lnTo>
+                <a:lnTo>
+                  <a:pt x="5081495" y="2562201"/>
+                </a:lnTo>
+                <a:lnTo>
+                  <a:pt x="5119416" y="2601762"/>
+                </a:lnTo>
+                <a:lnTo>
+                  <a:pt x="5157338" y="2639549"/>
+                </a:lnTo>
+                <a:lnTo>
+                  <a:pt x="5195259" y="2675450"/>
+                </a:lnTo>
+                <a:lnTo>
+                  <a:pt x="5233181" y="2709348"/>
+                </a:lnTo>
+                <a:lnTo>
+                  <a:pt x="5271103" y="2741125"/>
+                </a:lnTo>
+                <a:lnTo>
+                  <a:pt x="5309024" y="2770661"/>
+                </a:lnTo>
+                <a:lnTo>
+                  <a:pt x="5346946" y="2797834"/>
+                </a:lnTo>
+                <a:lnTo>
+                  <a:pt x="5384867" y="2822517"/>
+                </a:lnTo>
+                <a:lnTo>
+                  <a:pt x="5422789" y="2844584"/>
+                </a:lnTo>
+                <a:lnTo>
+                  <a:pt x="5460711" y="2863906"/>
+                </a:lnTo>
+                <a:lnTo>
+                  <a:pt x="5498632" y="2880350"/>
+                </a:lnTo>
+                <a:lnTo>
+                  <a:pt x="5536554" y="2893782"/>
+                </a:lnTo>
+                <a:lnTo>
+                  <a:pt x="5574475" y="2904065"/>
+                </a:lnTo>
+                <a:lnTo>
+                  <a:pt x="5612397" y="2911061"/>
+                </a:lnTo>
+                <a:lnTo>
+                  <a:pt x="5650319" y="2914628"/>
+                </a:lnTo>
+                <a:lnTo>
+                  <a:pt x="5669280" y="2915081"/>
+                </a:lnTo>
+              </a:path>
+            </a:pathLst>
+          </a:custGeom>
+          <a:noFill/>
+          <a:ln w="38100">
             <a:solidFill>
               <a:srgbClr val="8EDBD4"/>
             </a:solidFill>
-            <a:headEnd type="none" w="med" len="med"/>
-            <a:tailEnd type="triangle" w="med" len="med"/>
           </a:ln>
           <a:effectLst/>
         </p:spPr>
-      </p:cxnSp>
-      <p:sp>
-        <p:nvSpPr>
-          <p:cNvPr id="96" name="C4-E18 text 94" descr="sci-ppt:o094"/>
+        <p:txBody>
+          <a:bodyPr rtlCol="0" anchor="ctr"/>
+          <a:lstStyle/>
+          <a:p>
+            <a:pPr algn="ctr"/>
+          </a:p>
+        </p:txBody>
+      </p:sp>
+      <p:sp>
+        <p:nvSpPr>
+          <p:cNvPr id="31" name="C4-E18 text 29" descr="sci-ppt:o029"/>
           <p:cNvSpPr txBox="1"/>
           <p:nvPr/>
         </p:nvSpPr>
         <p:spPr>
           <a:xfrm>
-            <a:off x="9875520" y="1645920"/>
-            <a:ext cx="914400" cy="274320"/>
+            <a:off x="4105656" y="1280160"/>
+            <a:ext cx="2560320" cy="239395"/>
           </a:xfrm>
           <a:prstGeom prst="rect">
             <a:avLst/>
@@ -5292,7 +6224,7 @@
           <a:effectLst/>
         </p:spPr>
         <p:txBody>
-          <a:bodyPr wrap="square" lIns="27432" rIns="27432" tIns="18288" bIns="18288" anchor="ctr">
+          <a:bodyPr wrap="none" lIns="18288" rIns="18288" tIns="18288" bIns="18288" anchor="t">
             <a:spAutoFit/>
           </a:bodyPr>
           <a:lstStyle/>
@@ -5303,27 +6235,59 @@
               </a:spcAft>
             </a:pPr>
             <a:r>
-              <a:rPr sz="1700" b="0" i="0">
+              <a:rPr sz="1250" b="0" i="0">
                 <a:solidFill>
-                  <a:srgbClr val="E7F0F3"/>
+                  <a:srgbClr val="F2B880"/>
                 </a:solidFill>
                 <a:latin typeface="Arial"/>
               </a:rPr>
-              <a:t>b</a:t>
-            </a:r>
-          </a:p>
-        </p:txBody>
-      </p:sp>
-      <p:sp>
-        <p:nvSpPr>
-          <p:cNvPr id="97" name="C4-E18 text 95" descr="sci-ppt:o095"/>
+              <a:t>area = π/3 = 1.0472</a:t>
+            </a:r>
+          </a:p>
+        </p:txBody>
+      </p:sp>
+      <p:sp>
+        <p:nvSpPr>
+          <p:cNvPr id="32" name="C4-E18 round_rect 30" descr="sci-ppt:o030"/>
+          <p:cNvSpPr/>
+          <p:nvPr/>
+        </p:nvSpPr>
+        <p:spPr>
+          <a:xfrm>
+            <a:off x="6858000" y="1371600"/>
+            <a:ext cx="4983480" cy="3566160"/>
+          </a:xfrm>
+          <a:prstGeom prst="roundRect">
+            <a:avLst/>
+          </a:prstGeom>
+          <a:solidFill>
+            <a:srgbClr val="213E4B"/>
+          </a:solidFill>
+          <a:ln w="20320">
+            <a:solidFill>
+              <a:srgbClr val="8EDBD4"/>
+            </a:solidFill>
+          </a:ln>
+          <a:effectLst/>
+        </p:spPr>
+        <p:txBody>
+          <a:bodyPr rtlCol="0" anchor="ctr"/>
+          <a:lstStyle/>
+          <a:p>
+            <a:pPr algn="ctr"/>
+          </a:p>
+        </p:txBody>
+      </p:sp>
+      <p:sp>
+        <p:nvSpPr>
+          <p:cNvPr id="33" name="C4-E18 text 31" descr="sci-ppt:o031"/>
           <p:cNvSpPr txBox="1"/>
           <p:nvPr/>
         </p:nvSpPr>
         <p:spPr>
           <a:xfrm>
-            <a:off x="8503920" y="3291840"/>
-            <a:ext cx="2743200" cy="365760"/>
+            <a:off x="6967728" y="1426464"/>
+            <a:ext cx="4764024" cy="254889"/>
           </a:xfrm>
           <a:prstGeom prst="rect">
             <a:avLst/>
@@ -5332,7 +6296,7 @@
           <a:effectLst/>
         </p:spPr>
         <p:txBody>
-          <a:bodyPr wrap="square" lIns="27432" rIns="27432" tIns="18288" bIns="18288" anchor="ctr">
+          <a:bodyPr wrap="none" lIns="18288" rIns="18288" tIns="18288" bIns="18288" anchor="t">
             <a:spAutoFit/>
           </a:bodyPr>
           <a:lstStyle/>
@@ -5343,27 +6307,27 @@
               </a:spcAft>
             </a:pPr>
             <a:r>
-              <a:rPr sz="1800" b="0" i="0">
+              <a:rPr sz="1350" b="1" i="0">
                 <a:solidFill>
-                  <a:srgbClr val="E7F0F3"/>
+                  <a:srgbClr val="8EDBD4"/>
                 </a:solidFill>
                 <a:latin typeface="Arial"/>
               </a:rPr>
-              <a:t>A_c = π b²</a:t>
-            </a:r>
-          </a:p>
-        </p:txBody>
-      </p:sp>
-      <p:sp>
-        <p:nvSpPr>
-          <p:cNvPr id="98" name="C4-E18 text 96" descr="sci-ppt:o096"/>
+              <a:t>Blister volume</a:t>
+            </a:r>
+          </a:p>
+        </p:txBody>
+      </p:sp>
+      <p:sp>
+        <p:nvSpPr>
+          <p:cNvPr id="34" name="C4-E18 text 32" descr="sci-ppt:o032"/>
           <p:cNvSpPr txBox="1"/>
           <p:nvPr/>
         </p:nvSpPr>
         <p:spPr>
           <a:xfrm>
-            <a:off x="685800" y="731520"/>
-            <a:ext cx="10972800" cy="365760"/>
+            <a:off x="6995160" y="1828800"/>
+            <a:ext cx="4754880" cy="247142"/>
           </a:xfrm>
           <a:prstGeom prst="rect">
             <a:avLst/>
@@ -5372,7 +6336,7 @@
           <a:effectLst/>
         </p:spPr>
         <p:txBody>
-          <a:bodyPr wrap="square" lIns="27432" rIns="27432" tIns="18288" bIns="18288" anchor="ctr">
+          <a:bodyPr wrap="none" lIns="18288" rIns="18288" tIns="18288" bIns="18288" anchor="t">
             <a:spAutoFit/>
           </a:bodyPr>
           <a:lstStyle/>
@@ -5383,49 +6347,27 @@
               </a:spcAft>
             </a:pPr>
             <a:r>
-              <a:rPr sz="1800" b="0" i="0">
+              <a:rPr sz="1300" b="1" i="0">
                 <a:solidFill>
-                  <a:srgbClr val="8EDBD4"/>
+                  <a:srgbClr val="E7F0F3"/>
                 </a:solidFill>
                 <a:latin typeface="Arial"/>
               </a:rPr>
-              <a:t>Clamped circular blister: w(b) = 0; w′(b) = 0; regular centre.</a:t>
-            </a:r>
-          </a:p>
-        </p:txBody>
-      </p:sp>
-      <p:cxnSp>
-        <p:nvCxnSpPr>
-          <p:cNvPr id="99" name="C4-E18 line 97" descr="sci-ppt:o097"/>
-          <p:cNvCxnSpPr/>
+              <a:t>V_bl = 2π ∫₀ᵇ w r dr</a:t>
+            </a:r>
+          </a:p>
+        </p:txBody>
+      </p:sp>
+      <p:sp>
+        <p:nvSpPr>
+          <p:cNvPr id="35" name="C4-E18 text 33" descr="sci-ppt:o033"/>
+          <p:cNvSpPr txBox="1"/>
           <p:nvPr/>
-        </p:nvCxnSpPr>
+        </p:nvSpPr>
         <p:spPr>
           <a:xfrm>
-            <a:off x="274320" y="3977639"/>
-            <a:ext cx="11612880" cy="0"/>
-          </a:xfrm>
-          <a:prstGeom prst="line">
-            <a:avLst/>
-          </a:prstGeom>
-          <a:ln w="12700">
-            <a:solidFill>
-              <a:srgbClr val="405967"/>
-            </a:solidFill>
-          </a:ln>
-          <a:effectLst/>
-        </p:spPr>
-      </p:cxnSp>
-      <p:sp>
-        <p:nvSpPr>
-          <p:cNvPr id="100" name="C4-E18 text 98" descr="sci-ppt:o098"/>
-          <p:cNvSpPr txBox="1"/>
-          <p:nvPr/>
-        </p:nvSpPr>
-        <p:spPr>
-          <a:xfrm>
-            <a:off x="320040" y="4096512"/>
-            <a:ext cx="5715000" cy="246888"/>
+            <a:off x="6995160" y="2331720"/>
+            <a:ext cx="4754880" cy="231648"/>
           </a:xfrm>
           <a:prstGeom prst="rect">
             <a:avLst/>
@@ -5434,7 +6376,7 @@
           <a:effectLst/>
         </p:spPr>
         <p:txBody>
-          <a:bodyPr wrap="square" lIns="27432" rIns="27432" tIns="18288" bIns="18288" anchor="ctr">
+          <a:bodyPr wrap="none" lIns="18288" rIns="18288" tIns="18288" bIns="18288" anchor="t">
             <a:spAutoFit/>
           </a:bodyPr>
           <a:lstStyle/>
@@ -5445,27 +6387,27 @@
               </a:spcAft>
             </a:pPr>
             <a:r>
-              <a:rPr sz="1150" b="0" i="0">
+              <a:rPr sz="1200" b="1" i="0">
                 <a:solidFill>
-                  <a:srgbClr val="B4C7D2"/>
+                  <a:srgbClr val="E7F0F3"/>
                 </a:solidFill>
                 <a:latin typeface="Arial"/>
               </a:rPr>
-              <a:t>• V_bl — volume below lifted plate</a:t>
-            </a:r>
-          </a:p>
-        </p:txBody>
-      </p:sp>
-      <p:sp>
-        <p:nvSpPr>
-          <p:cNvPr id="101" name="C4-E18 text 99" descr="sci-ppt:o099"/>
+              <a:t>= π p₀ / (32D_f) ∫ (b⁴r − 2b²r³ + r⁵) dr</a:t>
+            </a:r>
+          </a:p>
+        </p:txBody>
+      </p:sp>
+      <p:sp>
+        <p:nvSpPr>
+          <p:cNvPr id="36" name="C4-E18 text 34" descr="sci-ppt:o034"/>
           <p:cNvSpPr txBox="1"/>
           <p:nvPr/>
         </p:nvSpPr>
         <p:spPr>
           <a:xfrm>
-            <a:off x="6217920" y="4096512"/>
-            <a:ext cx="5715000" cy="246888"/>
+            <a:off x="6995160" y="2834640"/>
+            <a:ext cx="4754880" cy="231648"/>
           </a:xfrm>
           <a:prstGeom prst="rect">
             <a:avLst/>
@@ -5474,7 +6416,7 @@
           <a:effectLst/>
         </p:spPr>
         <p:txBody>
-          <a:bodyPr wrap="square" lIns="27432" rIns="27432" tIns="18288" bIns="18288" anchor="ctr">
+          <a:bodyPr wrap="none" lIns="18288" rIns="18288" tIns="18288" bIns="18288" anchor="t">
             <a:spAutoFit/>
           </a:bodyPr>
           <a:lstStyle/>
@@ -5485,27 +6427,27 @@
               </a:spcAft>
             </a:pPr>
             <a:r>
-              <a:rPr sz="1150" b="0" i="0">
+              <a:rPr sz="1200" b="0" i="0">
                 <a:solidFill>
                   <a:srgbClr val="B4C7D2"/>
                 </a:solidFill>
                 <a:latin typeface="Arial"/>
               </a:rPr>
-              <a:t>• w(r) ↑ local opening</a:t>
-            </a:r>
-          </a:p>
-        </p:txBody>
-      </p:sp>
-      <p:sp>
-        <p:nvSpPr>
-          <p:cNvPr id="102" name="C4-E18 text 100" descr="sci-ppt:o100"/>
+              <a:t>bracket at r = b:  b⁶ (1/2 − 1/2 + 1/6) = b⁶/6</a:t>
+            </a:r>
+          </a:p>
+        </p:txBody>
+      </p:sp>
+      <p:sp>
+        <p:nvSpPr>
+          <p:cNvPr id="37" name="C4-E18 text 35" descr="sci-ppt:o035"/>
           <p:cNvSpPr txBox="1"/>
           <p:nvPr/>
         </p:nvSpPr>
         <p:spPr>
           <a:xfrm>
-            <a:off x="320040" y="4329684"/>
-            <a:ext cx="5715000" cy="246888"/>
+            <a:off x="6995160" y="3383280"/>
+            <a:ext cx="4754880" cy="278130"/>
           </a:xfrm>
           <a:prstGeom prst="rect">
             <a:avLst/>
@@ -5514,7 +6456,7 @@
           <a:effectLst/>
         </p:spPr>
         <p:txBody>
-          <a:bodyPr wrap="square" lIns="27432" rIns="27432" tIns="18288" bIns="18288" anchor="ctr">
+          <a:bodyPr wrap="none" lIns="18288" rIns="18288" tIns="18288" bIns="18288" anchor="t">
             <a:spAutoFit/>
           </a:bodyPr>
           <a:lstStyle/>
@@ -5525,27 +6467,27 @@
               </a:spcAft>
             </a:pPr>
             <a:r>
-              <a:rPr sz="1150" b="0" i="0">
+              <a:rPr sz="1500" b="1" i="0">
                 <a:solidFill>
-                  <a:srgbClr val="B4C7D2"/>
+                  <a:srgbClr val="F2B880"/>
                 </a:solidFill>
                 <a:latin typeface="Arial"/>
               </a:rPr>
-              <a:t>• r dr → annular area weight</a:t>
-            </a:r>
-          </a:p>
-        </p:txBody>
-      </p:sp>
-      <p:sp>
-        <p:nvSpPr>
-          <p:cNvPr id="103" name="C4-E18 text 101" descr="sci-ppt:o101"/>
+              <a:t>V_bl = π p₀ b⁶ / (192 D_f)</a:t>
+            </a:r>
+          </a:p>
+        </p:txBody>
+      </p:sp>
+      <p:sp>
+        <p:nvSpPr>
+          <p:cNvPr id="38" name="C4-E18 text 36" descr="sci-ppt:o036"/>
           <p:cNvSpPr txBox="1"/>
           <p:nvPr/>
         </p:nvSpPr>
         <p:spPr>
           <a:xfrm>
-            <a:off x="6217920" y="4329684"/>
-            <a:ext cx="5715000" cy="246888"/>
+            <a:off x="914400" y="5486400"/>
+            <a:ext cx="10972800" cy="239395"/>
           </a:xfrm>
           <a:prstGeom prst="rect">
             <a:avLst/>
@@ -5554,7 +6496,7 @@
           <a:effectLst/>
         </p:spPr>
         <p:txBody>
-          <a:bodyPr wrap="square" lIns="27432" rIns="27432" tIns="18288" bIns="18288" anchor="ctr">
+          <a:bodyPr wrap="none" lIns="18288" rIns="18288" tIns="18288" bIns="18288" anchor="t">
             <a:spAutoFit/>
           </a:bodyPr>
           <a:lstStyle/>
@@ -5565,27 +6507,27 @@
               </a:spcAft>
             </a:pPr>
             <a:r>
-              <a:rPr sz="1150" b="0" i="0">
+              <a:rPr sz="1250" b="0" i="0">
                 <a:solidFill>
-                  <a:srgbClr val="B4C7D2"/>
+                  <a:srgbClr val="E7F0F3"/>
                 </a:solidFill>
                 <a:latin typeface="Arial"/>
               </a:rPr>
-              <a:t>• b — circular crack edge</a:t>
-            </a:r>
-          </a:p>
-        </p:txBody>
-      </p:sp>
-      <p:sp>
-        <p:nvSpPr>
-          <p:cNvPr id="104" name="C4-E18 text 102" descr="sci-ppt:o102"/>
+              <a:t>The volume sums the opening of all concentric annuli; the numerical area under 2π w r reproduces the closed form.</a:t>
+            </a:r>
+          </a:p>
+        </p:txBody>
+      </p:sp>
+      <p:sp>
+        <p:nvSpPr>
+          <p:cNvPr id="39" name="C4-E18 text 37" descr="sci-ppt:o037"/>
           <p:cNvSpPr txBox="1"/>
           <p:nvPr/>
         </p:nvSpPr>
         <p:spPr>
           <a:xfrm>
-            <a:off x="320040" y="4562856"/>
-            <a:ext cx="5715000" cy="246888"/>
+            <a:off x="320040" y="6510528"/>
+            <a:ext cx="11521440" cy="200660"/>
           </a:xfrm>
           <a:prstGeom prst="rect">
             <a:avLst/>
@@ -5594,87 +6536,7 @@
           <a:effectLst/>
         </p:spPr>
         <p:txBody>
-          <a:bodyPr wrap="square" lIns="27432" rIns="27432" tIns="18288" bIns="18288" anchor="ctr">
-            <a:spAutoFit/>
-          </a:bodyPr>
-          <a:lstStyle/>
-          <a:p>
-            <a:pPr algn="l">
-              <a:spcAft>
-                <a:spcPts val="0"/>
-              </a:spcAft>
-            </a:pPr>
-            <a:r>
-              <a:rPr sz="1150" b="0" i="0">
-                <a:solidFill>
-                  <a:srgbClr val="B4C7D2"/>
-                </a:solidFill>
-                <a:latin typeface="Arial"/>
-              </a:rPr>
-              <a:t>• p₀, D_f — compliance inputs</a:t>
-            </a:r>
-          </a:p>
-        </p:txBody>
-      </p:sp>
-      <p:sp>
-        <p:nvSpPr>
-          <p:cNvPr id="105" name="C4-E18 text 103" descr="sci-ppt:o103"/>
-          <p:cNvSpPr txBox="1"/>
-          <p:nvPr/>
-        </p:nvSpPr>
-        <p:spPr>
-          <a:xfrm>
-            <a:off x="320040" y="5596128"/>
-            <a:ext cx="11430000" cy="292608"/>
-          </a:xfrm>
-          <a:prstGeom prst="rect">
-            <a:avLst/>
-          </a:prstGeom>
-          <a:noFill/>
-          <a:effectLst/>
-        </p:spPr>
-        <p:txBody>
-          <a:bodyPr wrap="square" lIns="27432" rIns="27432" tIns="18288" bIns="18288" anchor="ctr">
-            <a:spAutoFit/>
-          </a:bodyPr>
-          <a:lstStyle/>
-          <a:p>
-            <a:pPr algn="l">
-              <a:spcAft>
-                <a:spcPts val="0"/>
-              </a:spcAft>
-            </a:pPr>
-            <a:r>
-              <a:rPr sz="1150" b="0" i="0">
-                <a:solidFill>
-                  <a:srgbClr val="8EDBD4"/>
-                </a:solidFill>
-                <a:latin typeface="Arial"/>
-              </a:rPr>
-              <a:t>Every annulus contributes its own displacement.</a:t>
-            </a:r>
-          </a:p>
-        </p:txBody>
-      </p:sp>
-      <p:sp>
-        <p:nvSpPr>
-          <p:cNvPr id="106" name="C4-E18 text 104" descr="sci-ppt:o104"/>
-          <p:cNvSpPr txBox="1"/>
-          <p:nvPr/>
-        </p:nvSpPr>
-        <p:spPr>
-          <a:xfrm>
-            <a:off x="320040" y="6473952"/>
-            <a:ext cx="11430000" cy="256032"/>
-          </a:xfrm>
-          <a:prstGeom prst="rect">
-            <a:avLst/>
-          </a:prstGeom>
-          <a:noFill/>
-          <a:effectLst/>
-        </p:spPr>
-        <p:txBody>
-          <a:bodyPr wrap="square" lIns="27432" rIns="27432" tIns="18288" bIns="18288" anchor="ctr">
+          <a:bodyPr wrap="none" lIns="18288" rIns="18288" tIns="18288" bIns="18288" anchor="t">
             <a:spAutoFit/>
           </a:bodyPr>
           <a:lstStyle/>
@@ -5691,7 +6553,7 @@
                 </a:solidFill>
                 <a:latin typeface="Arial"/>
               </a:rPr>
-              <a:t>Model schematic; geometry is not to scale.</a:t>
+              <a:t>Volume integral of Eq. C4-E18 (normalised: w/w(0) = (1 − x²)², x = r/b, area π/3 in units w(0)b²).</a:t>
             </a:r>
           </a:p>
         </p:txBody>
